--- a/SCV/S1_1991_트리순회.pptx
+++ b/SCV/S1_1991_트리순회.pptx
@@ -10,10 +10,11 @@
     <p:sldId id="259" r:id="rId4"/>
     <p:sldId id="264" r:id="rId5"/>
     <p:sldId id="258" r:id="rId6"/>
-    <p:sldId id="260" r:id="rId7"/>
-    <p:sldId id="261" r:id="rId8"/>
-    <p:sldId id="262" r:id="rId9"/>
-    <p:sldId id="263" r:id="rId10"/>
+    <p:sldId id="262" r:id="rId7"/>
+    <p:sldId id="260" r:id="rId8"/>
+    <p:sldId id="263" r:id="rId9"/>
+    <p:sldId id="265" r:id="rId10"/>
+    <p:sldId id="261" r:id="rId11"/>
   </p:sldIdLst>
   <p:sldSz cx="12192000" cy="6858000"/>
   <p:notesSz cx="6858000" cy="9144000"/>
@@ -3407,6 +3408,656 @@
 </p:sld>
 </file>
 
+<file path=ppt/slides/slide10.xml><?xml version="1.0" encoding="utf-8"?>
+<p:sld xmlns:a="http://schemas.openxmlformats.org/drawingml/2006/main" xmlns:r="http://schemas.openxmlformats.org/officeDocument/2006/relationships" xmlns:p="http://schemas.openxmlformats.org/presentationml/2006/main">
+  <p:cSld>
+    <p:bg>
+      <p:bgPr>
+        <a:solidFill>
+          <a:schemeClr val="bg1"/>
+        </a:solidFill>
+        <a:effectLst/>
+      </p:bgPr>
+    </p:bg>
+    <p:spTree>
+      <p:nvGrpSpPr>
+        <p:cNvPr id="1" name=""/>
+        <p:cNvGrpSpPr/>
+        <p:nvPr/>
+      </p:nvGrpSpPr>
+      <p:grpSpPr>
+        <a:xfrm>
+          <a:off x="0" y="0"/>
+          <a:ext cx="0" cy="0"/>
+          <a:chOff x="0" y="0"/>
+          <a:chExt cx="0" cy="0"/>
+        </a:xfrm>
+      </p:grpSpPr>
+      <p:sp useBgFill="1">
+        <p:nvSpPr>
+          <p:cNvPr id="12" name="Rectangle 11">
+            <a:extLst>
+              <a:ext uri="{FF2B5EF4-FFF2-40B4-BE49-F238E27FC236}">
+                <a16:creationId xmlns:a16="http://schemas.microsoft.com/office/drawing/2014/main" id="{2F687420-BEB4-45CD-8226-339BE553B8E6}"/>
+              </a:ext>
+              <a:ext uri="{C183D7F6-B498-43B3-948B-1728B52AA6E4}">
+                <adec:decorative xmlns:adec="http://schemas.microsoft.com/office/drawing/2017/decorative" val="1"/>
+              </a:ext>
+            </a:extLst>
+          </p:cNvPr>
+          <p:cNvSpPr>
+            <a:spLocks noGrp="1" noRot="1" noChangeAspect="1" noMove="1" noResize="1" noEditPoints="1" noAdjustHandles="1" noChangeArrowheads="1" noChangeShapeType="1" noTextEdit="1"/>
+          </p:cNvSpPr>
+          <p:nvPr>
+            <p:extLst>
+              <p:ext uri="{386F3935-93C4-4BCD-93E2-E3B085C9AB24}">
+                <p16:designElem xmlns:p16="http://schemas.microsoft.com/office/powerpoint/2015/main" val="1"/>
+              </p:ext>
+            </p:extLst>
+          </p:nvPr>
+        </p:nvSpPr>
+        <p:spPr>
+          <a:xfrm>
+            <a:off x="0" y="0"/>
+            <a:ext cx="12191999" cy="6857365"/>
+          </a:xfrm>
+          <a:prstGeom prst="rect">
+            <a:avLst/>
+          </a:prstGeom>
+          <a:ln>
+            <a:noFill/>
+          </a:ln>
+        </p:spPr>
+        <p:style>
+          <a:lnRef idx="2">
+            <a:schemeClr val="accent1">
+              <a:shade val="50000"/>
+            </a:schemeClr>
+          </a:lnRef>
+          <a:fillRef idx="1">
+            <a:schemeClr val="accent1"/>
+          </a:fillRef>
+          <a:effectRef idx="0">
+            <a:schemeClr val="accent1"/>
+          </a:effectRef>
+          <a:fontRef idx="minor">
+            <a:schemeClr val="lt1"/>
+          </a:fontRef>
+        </p:style>
+        <p:txBody>
+          <a:bodyPr rtlCol="0" anchor="ctr"/>
+          <a:lstStyle/>
+          <a:p>
+            <a:pPr algn="ctr"/>
+            <a:endParaRPr lang="en-US"/>
+          </a:p>
+        </p:txBody>
+      </p:sp>
+      <p:sp>
+        <p:nvSpPr>
+          <p:cNvPr id="2" name="제목 1">
+            <a:extLst>
+              <a:ext uri="{FF2B5EF4-FFF2-40B4-BE49-F238E27FC236}">
+                <a16:creationId xmlns:a16="http://schemas.microsoft.com/office/drawing/2014/main" id="{CE84C102-3BC8-8288-1F74-87537FD5EAD9}"/>
+              </a:ext>
+            </a:extLst>
+          </p:cNvPr>
+          <p:cNvSpPr>
+            <a:spLocks noGrp="1"/>
+          </p:cNvSpPr>
+          <p:nvPr>
+            <p:ph type="title"/>
+          </p:nvPr>
+        </p:nvSpPr>
+        <p:spPr>
+          <a:xfrm>
+            <a:off x="438985" y="-175484"/>
+            <a:ext cx="4282983" cy="1200361"/>
+          </a:xfrm>
+        </p:spPr>
+        <p:txBody>
+          <a:bodyPr anchor="b">
+            <a:normAutofit/>
+          </a:bodyPr>
+          <a:lstStyle/>
+          <a:p>
+            <a:r>
+              <a:rPr lang="ko-KR" altLang="en-US" sz="3600" dirty="0"/>
+              <a:t>트리 생성</a:t>
+            </a:r>
+          </a:p>
+        </p:txBody>
+      </p:sp>
+      <p:sp>
+        <p:nvSpPr>
+          <p:cNvPr id="14" name="Rectangle 13">
+            <a:extLst>
+              <a:ext uri="{FF2B5EF4-FFF2-40B4-BE49-F238E27FC236}">
+                <a16:creationId xmlns:a16="http://schemas.microsoft.com/office/drawing/2014/main" id="{169CC832-2974-4E8D-90ED-3E2941BA7336}"/>
+              </a:ext>
+              <a:ext uri="{C183D7F6-B498-43B3-948B-1728B52AA6E4}">
+                <adec:decorative xmlns:adec="http://schemas.microsoft.com/office/drawing/2017/decorative" val="1"/>
+              </a:ext>
+            </a:extLst>
+          </p:cNvPr>
+          <p:cNvSpPr>
+            <a:spLocks noGrp="1" noRot="1" noChangeAspect="1" noMove="1" noResize="1" noEditPoints="1" noAdjustHandles="1" noChangeArrowheads="1" noChangeShapeType="1" noTextEdit="1"/>
+          </p:cNvSpPr>
+          <p:nvPr>
+            <p:extLst>
+              <p:ext uri="{386F3935-93C4-4BCD-93E2-E3B085C9AB24}">
+                <p16:designElem xmlns:p16="http://schemas.microsoft.com/office/powerpoint/2015/main" val="1"/>
+              </p:ext>
+            </p:extLst>
+          </p:nvPr>
+        </p:nvSpPr>
+        <p:spPr>
+          <a:xfrm flipH="1">
+            <a:off x="616533" y="1944913"/>
+            <a:ext cx="4023360" cy="27432"/>
+          </a:xfrm>
+          <a:prstGeom prst="rect">
+            <a:avLst/>
+          </a:prstGeom>
+          <a:solidFill>
+            <a:schemeClr val="accent4"/>
+          </a:solidFill>
+          <a:ln>
+            <a:noFill/>
+          </a:ln>
+        </p:spPr>
+        <p:style>
+          <a:lnRef idx="2">
+            <a:schemeClr val="accent1">
+              <a:shade val="50000"/>
+            </a:schemeClr>
+          </a:lnRef>
+          <a:fillRef idx="1">
+            <a:schemeClr val="accent1"/>
+          </a:fillRef>
+          <a:effectRef idx="0">
+            <a:schemeClr val="accent1"/>
+          </a:effectRef>
+          <a:fontRef idx="minor">
+            <a:schemeClr val="lt1"/>
+          </a:fontRef>
+        </p:style>
+        <p:txBody>
+          <a:bodyPr rtlCol="0" anchor="ctr"/>
+          <a:lstStyle/>
+          <a:p>
+            <a:pPr algn="ctr"/>
+            <a:endParaRPr lang="en-US"/>
+          </a:p>
+        </p:txBody>
+      </p:sp>
+      <p:sp>
+        <p:nvSpPr>
+          <p:cNvPr id="9" name="Content Placeholder 8">
+            <a:extLst>
+              <a:ext uri="{FF2B5EF4-FFF2-40B4-BE49-F238E27FC236}">
+                <a16:creationId xmlns:a16="http://schemas.microsoft.com/office/drawing/2014/main" id="{844B3BDD-4037-DFCB-E3E8-01D0619BC9A2}"/>
+              </a:ext>
+            </a:extLst>
+          </p:cNvPr>
+          <p:cNvSpPr>
+            <a:spLocks noGrp="1"/>
+          </p:cNvSpPr>
+          <p:nvPr>
+            <p:ph idx="1"/>
+          </p:nvPr>
+        </p:nvSpPr>
+        <p:spPr>
+          <a:xfrm>
+            <a:off x="645066" y="2031101"/>
+            <a:ext cx="4282984" cy="3511943"/>
+          </a:xfrm>
+        </p:spPr>
+        <p:txBody>
+          <a:bodyPr anchor="ctr">
+            <a:normAutofit/>
+          </a:bodyPr>
+          <a:lstStyle/>
+          <a:p>
+            <a:endParaRPr lang="en-US" sz="1800" dirty="0"/>
+          </a:p>
+        </p:txBody>
+      </p:sp>
+      <p:sp>
+        <p:nvSpPr>
+          <p:cNvPr id="16" name="Rectangle 15">
+            <a:extLst>
+              <a:ext uri="{FF2B5EF4-FFF2-40B4-BE49-F238E27FC236}">
+                <a16:creationId xmlns:a16="http://schemas.microsoft.com/office/drawing/2014/main" id="{55222F96-971A-4F90-B841-6BAB416C7AC1}"/>
+              </a:ext>
+              <a:ext uri="{C183D7F6-B498-43B3-948B-1728B52AA6E4}">
+                <adec:decorative xmlns:adec="http://schemas.microsoft.com/office/drawing/2017/decorative" val="1"/>
+              </a:ext>
+            </a:extLst>
+          </p:cNvPr>
+          <p:cNvSpPr>
+            <a:spLocks noGrp="1" noRot="1" noChangeAspect="1" noMove="1" noResize="1" noEditPoints="1" noAdjustHandles="1" noChangeArrowheads="1" noChangeShapeType="1" noTextEdit="1"/>
+          </p:cNvSpPr>
+          <p:nvPr>
+            <p:extLst>
+              <p:ext uri="{386F3935-93C4-4BCD-93E2-E3B085C9AB24}">
+                <p16:designElem xmlns:p16="http://schemas.microsoft.com/office/powerpoint/2015/main" val="1"/>
+              </p:ext>
+            </p:extLst>
+          </p:nvPr>
+        </p:nvSpPr>
+        <p:spPr>
+          <a:xfrm rot="5400000">
+            <a:off x="-225843" y="6053360"/>
+            <a:ext cx="740664" cy="154124"/>
+          </a:xfrm>
+          <a:prstGeom prst="rect">
+            <a:avLst/>
+          </a:prstGeom>
+          <a:solidFill>
+            <a:schemeClr val="accent4"/>
+          </a:solidFill>
+          <a:ln>
+            <a:noFill/>
+          </a:ln>
+        </p:spPr>
+        <p:style>
+          <a:lnRef idx="2">
+            <a:schemeClr val="accent1">
+              <a:shade val="50000"/>
+            </a:schemeClr>
+          </a:lnRef>
+          <a:fillRef idx="1">
+            <a:schemeClr val="accent1"/>
+          </a:fillRef>
+          <a:effectRef idx="0">
+            <a:schemeClr val="accent1"/>
+          </a:effectRef>
+          <a:fontRef idx="minor">
+            <a:schemeClr val="lt1"/>
+          </a:fontRef>
+        </p:style>
+        <p:txBody>
+          <a:bodyPr rtlCol="0" anchor="ctr"/>
+          <a:lstStyle/>
+          <a:p>
+            <a:pPr algn="ctr"/>
+            <a:endParaRPr lang="en-US"/>
+          </a:p>
+        </p:txBody>
+      </p:sp>
+      <p:sp>
+        <p:nvSpPr>
+          <p:cNvPr id="18" name="Rectangle 17">
+            <a:extLst>
+              <a:ext uri="{FF2B5EF4-FFF2-40B4-BE49-F238E27FC236}">
+                <a16:creationId xmlns:a16="http://schemas.microsoft.com/office/drawing/2014/main" id="{08980754-6F4B-43C9-B9BE-127B6BED6586}"/>
+              </a:ext>
+              <a:ext uri="{C183D7F6-B498-43B3-948B-1728B52AA6E4}">
+                <adec:decorative xmlns:adec="http://schemas.microsoft.com/office/drawing/2017/decorative" val="1"/>
+              </a:ext>
+            </a:extLst>
+          </p:cNvPr>
+          <p:cNvSpPr>
+            <a:spLocks noGrp="1" noRot="1" noChangeAspect="1" noMove="1" noResize="1" noEditPoints="1" noAdjustHandles="1" noChangeArrowheads="1" noChangeShapeType="1" noTextEdit="1"/>
+          </p:cNvSpPr>
+          <p:nvPr>
+            <p:extLst>
+              <p:ext uri="{386F3935-93C4-4BCD-93E2-E3B085C9AB24}">
+                <p16:designElem xmlns:p16="http://schemas.microsoft.com/office/powerpoint/2015/main" val="1"/>
+              </p:ext>
+            </p:extLst>
+          </p:nvPr>
+        </p:nvSpPr>
+        <p:spPr>
+          <a:xfrm rot="5400000">
+            <a:off x="5904923" y="215201"/>
+            <a:ext cx="740664" cy="11833491"/>
+          </a:xfrm>
+          <a:prstGeom prst="rect">
+            <a:avLst/>
+          </a:prstGeom>
+          <a:solidFill>
+            <a:schemeClr val="accent4"/>
+          </a:solidFill>
+          <a:ln>
+            <a:noFill/>
+          </a:ln>
+        </p:spPr>
+        <p:style>
+          <a:lnRef idx="2">
+            <a:schemeClr val="accent1">
+              <a:shade val="50000"/>
+            </a:schemeClr>
+          </a:lnRef>
+          <a:fillRef idx="1">
+            <a:schemeClr val="accent1"/>
+          </a:fillRef>
+          <a:effectRef idx="0">
+            <a:schemeClr val="accent1"/>
+          </a:effectRef>
+          <a:fontRef idx="minor">
+            <a:schemeClr val="lt1"/>
+          </a:fontRef>
+        </p:style>
+        <p:txBody>
+          <a:bodyPr rtlCol="0" anchor="ctr"/>
+          <a:lstStyle/>
+          <a:p>
+            <a:pPr algn="ctr"/>
+            <a:endParaRPr lang="en-US"/>
+          </a:p>
+        </p:txBody>
+      </p:sp>
+      <p:sp>
+        <p:nvSpPr>
+          <p:cNvPr id="20" name="Rectangle 19">
+            <a:extLst>
+              <a:ext uri="{FF2B5EF4-FFF2-40B4-BE49-F238E27FC236}">
+                <a16:creationId xmlns:a16="http://schemas.microsoft.com/office/drawing/2014/main" id="{2C1BBA94-3F40-40AA-8BB9-E69E25E537C1}"/>
+              </a:ext>
+              <a:ext uri="{C183D7F6-B498-43B3-948B-1728B52AA6E4}">
+                <adec:decorative xmlns:adec="http://schemas.microsoft.com/office/drawing/2017/decorative" val="1"/>
+              </a:ext>
+            </a:extLst>
+          </p:cNvPr>
+          <p:cNvSpPr>
+            <a:spLocks noGrp="1" noRot="1" noChangeAspect="1" noMove="1" noResize="1" noEditPoints="1" noAdjustHandles="1" noChangeArrowheads="1" noChangeShapeType="1" noTextEdit="1"/>
+          </p:cNvSpPr>
+          <p:nvPr>
+            <p:extLst>
+              <p:ext uri="{386F3935-93C4-4BCD-93E2-E3B085C9AB24}">
+                <p16:designElem xmlns:p16="http://schemas.microsoft.com/office/powerpoint/2015/main" val="1"/>
+              </p:ext>
+            </p:extLst>
+          </p:nvPr>
+        </p:nvSpPr>
+        <p:spPr>
+          <a:xfrm>
+            <a:off x="5696793" y="354959"/>
+            <a:ext cx="6184973" cy="5915212"/>
+          </a:xfrm>
+          <a:prstGeom prst="rect">
+            <a:avLst/>
+          </a:prstGeom>
+          <a:solidFill>
+            <a:schemeClr val="bg1"/>
+          </a:solidFill>
+          <a:ln>
+            <a:noFill/>
+          </a:ln>
+          <a:effectLst>
+            <a:outerShdw blurRad="139700" dist="127000" dir="5400000" algn="t" rotWithShape="0">
+              <a:prstClr val="black">
+                <a:alpha val="15000"/>
+              </a:prstClr>
+            </a:outerShdw>
+          </a:effectLst>
+        </p:spPr>
+        <p:style>
+          <a:lnRef idx="2">
+            <a:schemeClr val="accent1">
+              <a:shade val="50000"/>
+            </a:schemeClr>
+          </a:lnRef>
+          <a:fillRef idx="1">
+            <a:schemeClr val="accent1"/>
+          </a:fillRef>
+          <a:effectRef idx="0">
+            <a:schemeClr val="accent1"/>
+          </a:effectRef>
+          <a:fontRef idx="minor">
+            <a:schemeClr val="lt1"/>
+          </a:fontRef>
+        </p:style>
+        <p:txBody>
+          <a:bodyPr rtlCol="0" anchor="ctr"/>
+          <a:lstStyle/>
+          <a:p>
+            <a:pPr algn="ctr"/>
+            <a:endParaRPr lang="en-US"/>
+          </a:p>
+        </p:txBody>
+      </p:sp>
+      <p:pic>
+        <p:nvPicPr>
+          <p:cNvPr id="10" name="그림 9">
+            <a:extLst>
+              <a:ext uri="{FF2B5EF4-FFF2-40B4-BE49-F238E27FC236}">
+                <a16:creationId xmlns:a16="http://schemas.microsoft.com/office/drawing/2014/main" id="{1F64A983-8A74-5AAD-5762-6836BC250EE9}"/>
+              </a:ext>
+            </a:extLst>
+          </p:cNvPr>
+          <p:cNvPicPr>
+            <a:picLocks noChangeAspect="1"/>
+          </p:cNvPicPr>
+          <p:nvPr/>
+        </p:nvPicPr>
+        <p:blipFill>
+          <a:blip r:embed="rId2"/>
+          <a:stretch>
+            <a:fillRect/>
+          </a:stretch>
+        </p:blipFill>
+        <p:spPr>
+          <a:xfrm>
+            <a:off x="5559835" y="91585"/>
+            <a:ext cx="5987099" cy="6674193"/>
+          </a:xfrm>
+          <a:prstGeom prst="rect">
+            <a:avLst/>
+          </a:prstGeom>
+        </p:spPr>
+      </p:pic>
+      <p:pic>
+        <p:nvPicPr>
+          <p:cNvPr id="3" name="내용 개체 틀 4" descr="원, 스케치, 그림, 도표이(가) 표시된 사진&#10;&#10;자동 생성된 설명">
+            <a:extLst>
+              <a:ext uri="{FF2B5EF4-FFF2-40B4-BE49-F238E27FC236}">
+                <a16:creationId xmlns:a16="http://schemas.microsoft.com/office/drawing/2014/main" id="{C66E8F0F-D053-B341-1C29-BCA0A09F7CBB}"/>
+              </a:ext>
+            </a:extLst>
+          </p:cNvPr>
+          <p:cNvPicPr>
+            <a:picLocks noChangeAspect="1"/>
+          </p:cNvPicPr>
+          <p:nvPr/>
+        </p:nvPicPr>
+        <p:blipFill rotWithShape="1">
+          <a:blip r:embed="rId3"/>
+          <a:srcRect r="1" b="304"/>
+          <a:stretch/>
+        </p:blipFill>
+        <p:spPr>
+          <a:xfrm>
+            <a:off x="221551" y="1857171"/>
+            <a:ext cx="4862793" cy="3705923"/>
+          </a:xfrm>
+          <a:custGeom>
+            <a:avLst/>
+            <a:gdLst/>
+            <a:ahLst/>
+            <a:cxnLst/>
+            <a:rect l="l" t="t" r="r" b="b"/>
+            <a:pathLst>
+              <a:path w="6878775" h="6858000">
+                <a:moveTo>
+                  <a:pt x="1102973" y="0"/>
+                </a:moveTo>
+                <a:lnTo>
+                  <a:pt x="1160688" y="0"/>
+                </a:lnTo>
+                <a:lnTo>
+                  <a:pt x="983189" y="331786"/>
+                </a:lnTo>
+                <a:cubicBezTo>
+                  <a:pt x="914866" y="469145"/>
+                  <a:pt x="850355" y="608712"/>
+                  <a:pt x="789261" y="750263"/>
+                </a:cubicBezTo>
+                <a:cubicBezTo>
+                  <a:pt x="774307" y="784928"/>
+                  <a:pt x="759992" y="819849"/>
+                  <a:pt x="745295" y="854514"/>
+                </a:cubicBezTo>
+                <a:cubicBezTo>
+                  <a:pt x="756682" y="845393"/>
+                  <a:pt x="765489" y="833492"/>
+                  <a:pt x="770857" y="819975"/>
+                </a:cubicBezTo>
+                <a:cubicBezTo>
+                  <a:pt x="879943" y="589569"/>
+                  <a:pt x="999605" y="365513"/>
+                  <a:pt x="1131329" y="148742"/>
+                </a:cubicBezTo>
+                <a:lnTo>
+                  <a:pt x="1227589" y="0"/>
+                </a:lnTo>
+                <a:lnTo>
+                  <a:pt x="6878775" y="0"/>
+                </a:lnTo>
+                <a:lnTo>
+                  <a:pt x="6878775" y="6858000"/>
+                </a:lnTo>
+                <a:lnTo>
+                  <a:pt x="713521" y="6858000"/>
+                </a:lnTo>
+                <a:lnTo>
+                  <a:pt x="625642" y="6670527"/>
+                </a:lnTo>
+                <a:cubicBezTo>
+                  <a:pt x="507232" y="6398531"/>
+                  <a:pt x="403083" y="6118381"/>
+                  <a:pt x="312785" y="5830359"/>
+                </a:cubicBezTo>
+                <a:cubicBezTo>
+                  <a:pt x="278149" y="5719759"/>
+                  <a:pt x="248879" y="5607635"/>
+                  <a:pt x="212198" y="5480401"/>
+                </a:cubicBezTo>
+                <a:cubicBezTo>
+                  <a:pt x="212208" y="5491601"/>
+                  <a:pt x="212803" y="5502788"/>
+                  <a:pt x="213988" y="5513923"/>
+                </a:cubicBezTo>
+                <a:cubicBezTo>
+                  <a:pt x="264089" y="5723695"/>
+                  <a:pt x="307290" y="5935370"/>
+                  <a:pt x="365826" y="6142729"/>
+                </a:cubicBezTo>
+                <a:cubicBezTo>
+                  <a:pt x="433152" y="6380817"/>
+                  <a:pt x="510068" y="6614016"/>
+                  <a:pt x="597975" y="6841549"/>
+                </a:cubicBezTo>
+                <a:lnTo>
+                  <a:pt x="604824" y="6858000"/>
+                </a:lnTo>
+                <a:lnTo>
+                  <a:pt x="552056" y="6858000"/>
+                </a:lnTo>
+                <a:lnTo>
+                  <a:pt x="539576" y="6828295"/>
+                </a:lnTo>
+                <a:cubicBezTo>
+                  <a:pt x="380597" y="6414594"/>
+                  <a:pt x="260223" y="5988893"/>
+                  <a:pt x="171555" y="5552906"/>
+                </a:cubicBezTo>
+                <a:cubicBezTo>
+                  <a:pt x="91163" y="5157998"/>
+                  <a:pt x="43746" y="4758899"/>
+                  <a:pt x="12305" y="4357388"/>
+                </a:cubicBezTo>
+                <a:cubicBezTo>
+                  <a:pt x="-14281" y="4013908"/>
+                  <a:pt x="4507" y="3672965"/>
+                  <a:pt x="46684" y="3331516"/>
+                </a:cubicBezTo>
+                <a:cubicBezTo>
+                  <a:pt x="127203" y="2664286"/>
+                  <a:pt x="277819" y="2007265"/>
+                  <a:pt x="496065" y="1371196"/>
+                </a:cubicBezTo>
+                <a:cubicBezTo>
+                  <a:pt x="636273" y="966066"/>
+                  <a:pt x="800445" y="573253"/>
+                  <a:pt x="995723" y="196614"/>
+                </a:cubicBezTo>
+                <a:close/>
+              </a:path>
+            </a:pathLst>
+          </a:custGeom>
+        </p:spPr>
+      </p:pic>
+      <p:sp>
+        <p:nvSpPr>
+          <p:cNvPr id="5" name="제목 1">
+            <a:extLst>
+              <a:ext uri="{FF2B5EF4-FFF2-40B4-BE49-F238E27FC236}">
+                <a16:creationId xmlns:a16="http://schemas.microsoft.com/office/drawing/2014/main" id="{1C3CE6CC-5C59-10EC-DF6C-505D9A9C96FF}"/>
+              </a:ext>
+            </a:extLst>
+          </p:cNvPr>
+          <p:cNvSpPr txBox="1">
+            <a:spLocks/>
+          </p:cNvSpPr>
+          <p:nvPr/>
+        </p:nvSpPr>
+        <p:spPr>
+          <a:xfrm>
+            <a:off x="455842" y="1198807"/>
+            <a:ext cx="1668887" cy="635616"/>
+          </a:xfrm>
+          <a:prstGeom prst="rect">
+            <a:avLst/>
+          </a:prstGeom>
+        </p:spPr>
+        <p:txBody>
+          <a:bodyPr vert="horz" lIns="91440" tIns="45720" rIns="91440" bIns="45720" rtlCol="0" anchor="ctr">
+            <a:normAutofit fontScale="92500" lnSpcReduction="10000"/>
+          </a:bodyPr>
+          <a:lstStyle>
+            <a:lvl1pPr algn="l" defTabSz="914400" rtl="0" eaLnBrk="1" latinLnBrk="1" hangingPunct="1">
+              <a:lnSpc>
+                <a:spcPct val="90000"/>
+              </a:lnSpc>
+              <a:spcBef>
+                <a:spcPct val="0"/>
+              </a:spcBef>
+              <a:buNone/>
+              <a:defRPr sz="4400" kern="1200">
+                <a:solidFill>
+                  <a:schemeClr val="tx1"/>
+                </a:solidFill>
+                <a:latin typeface="+mj-lt"/>
+                <a:ea typeface="+mj-ea"/>
+                <a:cs typeface="+mj-cs"/>
+              </a:defRPr>
+            </a:lvl1pPr>
+          </a:lstStyle>
+          <a:p>
+            <a:r>
+              <a:rPr lang="en-US" altLang="ko-KR" dirty="0"/>
+              <a:t>A B C</a:t>
+            </a:r>
+            <a:endParaRPr lang="ko-KR" altLang="en-US" dirty="0"/>
+          </a:p>
+        </p:txBody>
+      </p:sp>
+    </p:spTree>
+    <p:extLst>
+      <p:ext uri="{BB962C8B-B14F-4D97-AF65-F5344CB8AC3E}">
+        <p14:creationId xmlns:p14="http://schemas.microsoft.com/office/powerpoint/2010/main" val="133315169"/>
+      </p:ext>
+    </p:extLst>
+  </p:cSld>
+  <p:clrMapOvr>
+    <a:masterClrMapping/>
+  </p:clrMapOvr>
+</p:sld>
+</file>
+
 <file path=ppt/slides/slide2.xml><?xml version="1.0" encoding="utf-8"?>
 <p:sld xmlns:a="http://schemas.openxmlformats.org/drawingml/2006/main" xmlns:r="http://schemas.openxmlformats.org/officeDocument/2006/relationships" xmlns:p="http://schemas.openxmlformats.org/presentationml/2006/main">
   <p:cSld>
@@ -5480,6 +6131,566 @@
 <file path=ppt/slides/slide6.xml><?xml version="1.0" encoding="utf-8"?>
 <p:sld xmlns:a="http://schemas.openxmlformats.org/drawingml/2006/main" xmlns:r="http://schemas.openxmlformats.org/officeDocument/2006/relationships" xmlns:p="http://schemas.openxmlformats.org/presentationml/2006/main">
   <p:cSld>
+    <p:bg>
+      <p:bgPr>
+        <a:solidFill>
+          <a:schemeClr val="bg1"/>
+        </a:solidFill>
+        <a:effectLst/>
+      </p:bgPr>
+    </p:bg>
+    <p:spTree>
+      <p:nvGrpSpPr>
+        <p:cNvPr id="1" name=""/>
+        <p:cNvGrpSpPr/>
+        <p:nvPr/>
+      </p:nvGrpSpPr>
+      <p:grpSpPr>
+        <a:xfrm>
+          <a:off x="0" y="0"/>
+          <a:ext cx="0" cy="0"/>
+          <a:chOff x="0" y="0"/>
+          <a:chExt cx="0" cy="0"/>
+        </a:xfrm>
+      </p:grpSpPr>
+      <p:sp useBgFill="1">
+        <p:nvSpPr>
+          <p:cNvPr id="11" name="Rectangle 10">
+            <a:extLst>
+              <a:ext uri="{FF2B5EF4-FFF2-40B4-BE49-F238E27FC236}">
+                <a16:creationId xmlns:a16="http://schemas.microsoft.com/office/drawing/2014/main" id="{201CC55D-ED54-4C5C-95E6-10947BD1103B}"/>
+              </a:ext>
+              <a:ext uri="{C183D7F6-B498-43B3-948B-1728B52AA6E4}">
+                <adec:decorative xmlns:adec="http://schemas.microsoft.com/office/drawing/2017/decorative" val="1"/>
+              </a:ext>
+            </a:extLst>
+          </p:cNvPr>
+          <p:cNvSpPr>
+            <a:spLocks noGrp="1" noRot="1" noChangeAspect="1" noMove="1" noResize="1" noEditPoints="1" noAdjustHandles="1" noChangeArrowheads="1" noChangeShapeType="1" noTextEdit="1"/>
+          </p:cNvSpPr>
+          <p:nvPr>
+            <p:extLst>
+              <p:ext uri="{386F3935-93C4-4BCD-93E2-E3B085C9AB24}">
+                <p16:designElem xmlns:p16="http://schemas.microsoft.com/office/powerpoint/2015/main" val="1"/>
+              </p:ext>
+            </p:extLst>
+          </p:nvPr>
+        </p:nvSpPr>
+        <p:spPr>
+          <a:xfrm>
+            <a:off x="0" y="0"/>
+            <a:ext cx="12191999" cy="6857365"/>
+          </a:xfrm>
+          <a:prstGeom prst="rect">
+            <a:avLst/>
+          </a:prstGeom>
+          <a:ln>
+            <a:noFill/>
+          </a:ln>
+        </p:spPr>
+        <p:style>
+          <a:lnRef idx="2">
+            <a:schemeClr val="accent1">
+              <a:shade val="50000"/>
+            </a:schemeClr>
+          </a:lnRef>
+          <a:fillRef idx="1">
+            <a:schemeClr val="accent1"/>
+          </a:fillRef>
+          <a:effectRef idx="0">
+            <a:schemeClr val="accent1"/>
+          </a:effectRef>
+          <a:fontRef idx="minor">
+            <a:schemeClr val="lt1"/>
+          </a:fontRef>
+        </p:style>
+        <p:txBody>
+          <a:bodyPr rtlCol="0" anchor="ctr"/>
+          <a:lstStyle/>
+          <a:p>
+            <a:pPr algn="ctr"/>
+            <a:endParaRPr lang="en-US"/>
+          </a:p>
+        </p:txBody>
+      </p:sp>
+      <p:sp>
+        <p:nvSpPr>
+          <p:cNvPr id="2" name="제목 1">
+            <a:extLst>
+              <a:ext uri="{FF2B5EF4-FFF2-40B4-BE49-F238E27FC236}">
+                <a16:creationId xmlns:a16="http://schemas.microsoft.com/office/drawing/2014/main" id="{0A827646-DFF8-B4E8-3DFC-4E370BD11ABD}"/>
+              </a:ext>
+            </a:extLst>
+          </p:cNvPr>
+          <p:cNvSpPr>
+            <a:spLocks noGrp="1"/>
+          </p:cNvSpPr>
+          <p:nvPr>
+            <p:ph type="title"/>
+          </p:nvPr>
+        </p:nvSpPr>
+        <p:spPr>
+          <a:xfrm>
+            <a:off x="589560" y="856180"/>
+            <a:ext cx="4560584" cy="1128068"/>
+          </a:xfrm>
+        </p:spPr>
+        <p:txBody>
+          <a:bodyPr anchor="ctr">
+            <a:normAutofit/>
+          </a:bodyPr>
+          <a:lstStyle/>
+          <a:p>
+            <a:r>
+              <a:rPr lang="ko-KR" altLang="en-US" sz="4000" dirty="0"/>
+              <a:t>전위</a:t>
+            </a:r>
+            <a:r>
+              <a:rPr lang="en-US" altLang="ko-KR" sz="4000" dirty="0"/>
+              <a:t>, </a:t>
+            </a:r>
+            <a:r>
+              <a:rPr lang="ko-KR" altLang="en-US" sz="4000" dirty="0"/>
+              <a:t>중위</a:t>
+            </a:r>
+            <a:r>
+              <a:rPr lang="en-US" altLang="ko-KR" sz="4000" dirty="0"/>
+              <a:t>,</a:t>
+            </a:r>
+            <a:r>
+              <a:rPr lang="ko-KR" altLang="en-US" sz="4000" dirty="0"/>
+              <a:t> 후위</a:t>
+            </a:r>
+          </a:p>
+        </p:txBody>
+      </p:sp>
+      <p:grpSp>
+        <p:nvGrpSpPr>
+          <p:cNvPr id="13" name="Group 12">
+            <a:extLst>
+              <a:ext uri="{FF2B5EF4-FFF2-40B4-BE49-F238E27FC236}">
+                <a16:creationId xmlns:a16="http://schemas.microsoft.com/office/drawing/2014/main" id="{1DE889C7-FAD6-4397-98E2-05D503484459}"/>
+              </a:ext>
+              <a:ext uri="{C183D7F6-B498-43B3-948B-1728B52AA6E4}">
+                <adec:decorative xmlns:adec="http://schemas.microsoft.com/office/drawing/2017/decorative" val="1"/>
+              </a:ext>
+            </a:extLst>
+          </p:cNvPr>
+          <p:cNvGrpSpPr>
+            <a:grpSpLocks noGrp="1" noUngrp="1" noRot="1" noChangeAspect="1" noMove="1" noResize="1"/>
+          </p:cNvGrpSpPr>
+          <p:nvPr>
+            <p:extLst>
+              <p:ext uri="{386F3935-93C4-4BCD-93E2-E3B085C9AB24}">
+                <p16:designElem xmlns:p16="http://schemas.microsoft.com/office/powerpoint/2015/main" val="1"/>
+              </p:ext>
+            </p:extLst>
+          </p:nvPr>
+        </p:nvGrpSpPr>
+        <p:grpSpPr>
+          <a:xfrm>
+            <a:off x="0" y="1083484"/>
+            <a:ext cx="355196" cy="673460"/>
+            <a:chOff x="0" y="823811"/>
+            <a:chExt cx="355196" cy="673460"/>
+          </a:xfrm>
+        </p:grpSpPr>
+        <p:sp>
+          <p:nvSpPr>
+            <p:cNvPr id="14" name="Rectangle 13">
+              <a:extLst>
+                <a:ext uri="{FF2B5EF4-FFF2-40B4-BE49-F238E27FC236}">
+                  <a16:creationId xmlns:a16="http://schemas.microsoft.com/office/drawing/2014/main" id="{F399A70F-F8CD-4992-9EF5-6CF15472E73F}"/>
+                </a:ext>
+                <a:ext uri="{C183D7F6-B498-43B3-948B-1728B52AA6E4}">
+                  <adec:decorative xmlns:adec="http://schemas.microsoft.com/office/drawing/2017/decorative" val="1"/>
+                </a:ext>
+              </a:extLst>
+            </p:cNvPr>
+            <p:cNvSpPr/>
+            <p:nvPr>
+              <p:extLst>
+                <p:ext uri="{386F3935-93C4-4BCD-93E2-E3B085C9AB24}">
+                  <p16:designElem xmlns:p16="http://schemas.microsoft.com/office/powerpoint/2015/main" val="1"/>
+                </p:ext>
+              </p:extLst>
+            </p:nvPr>
+          </p:nvSpPr>
+          <p:spPr>
+            <a:xfrm>
+              <a:off x="0" y="823811"/>
+              <a:ext cx="87363" cy="673460"/>
+            </a:xfrm>
+            <a:prstGeom prst="rect">
+              <a:avLst/>
+            </a:prstGeom>
+            <a:solidFill>
+              <a:schemeClr val="accent4"/>
+            </a:solidFill>
+            <a:ln>
+              <a:noFill/>
+            </a:ln>
+          </p:spPr>
+          <p:style>
+            <a:lnRef idx="2">
+              <a:schemeClr val="accent1">
+                <a:shade val="50000"/>
+              </a:schemeClr>
+            </a:lnRef>
+            <a:fillRef idx="1">
+              <a:schemeClr val="accent1"/>
+            </a:fillRef>
+            <a:effectRef idx="0">
+              <a:schemeClr val="accent1"/>
+            </a:effectRef>
+            <a:fontRef idx="minor">
+              <a:schemeClr val="lt1"/>
+            </a:fontRef>
+          </p:style>
+          <p:txBody>
+            <a:bodyPr rtlCol="0" anchor="ctr"/>
+            <a:lstStyle/>
+            <a:p>
+              <a:pPr algn="ctr"/>
+              <a:endParaRPr lang="en-US"/>
+            </a:p>
+          </p:txBody>
+        </p:sp>
+        <p:sp>
+          <p:nvSpPr>
+            <p:cNvPr id="15" name="Rectangle 14">
+              <a:extLst>
+                <a:ext uri="{FF2B5EF4-FFF2-40B4-BE49-F238E27FC236}">
+                  <a16:creationId xmlns:a16="http://schemas.microsoft.com/office/drawing/2014/main" id="{48F4FEDC-6D80-458C-A665-075D9B9500FD}"/>
+                </a:ext>
+                <a:ext uri="{C183D7F6-B498-43B3-948B-1728B52AA6E4}">
+                  <adec:decorative xmlns:adec="http://schemas.microsoft.com/office/drawing/2017/decorative" val="1"/>
+                </a:ext>
+              </a:extLst>
+            </p:cNvPr>
+            <p:cNvSpPr/>
+            <p:nvPr>
+              <p:extLst>
+                <p:ext uri="{386F3935-93C4-4BCD-93E2-E3B085C9AB24}">
+                  <p16:designElem xmlns:p16="http://schemas.microsoft.com/office/powerpoint/2015/main" val="1"/>
+                </p:ext>
+              </p:extLst>
+            </p:nvPr>
+          </p:nvSpPr>
+          <p:spPr>
+            <a:xfrm>
+              <a:off x="159341" y="823811"/>
+              <a:ext cx="195855" cy="673460"/>
+            </a:xfrm>
+            <a:prstGeom prst="rect">
+              <a:avLst/>
+            </a:prstGeom>
+            <a:solidFill>
+              <a:schemeClr val="accent4"/>
+            </a:solidFill>
+            <a:ln>
+              <a:noFill/>
+            </a:ln>
+          </p:spPr>
+          <p:style>
+            <a:lnRef idx="2">
+              <a:schemeClr val="accent1">
+                <a:shade val="50000"/>
+              </a:schemeClr>
+            </a:lnRef>
+            <a:fillRef idx="1">
+              <a:schemeClr val="accent1"/>
+            </a:fillRef>
+            <a:effectRef idx="0">
+              <a:schemeClr val="accent1"/>
+            </a:effectRef>
+            <a:fontRef idx="minor">
+              <a:schemeClr val="lt1"/>
+            </a:fontRef>
+          </p:style>
+          <p:txBody>
+            <a:bodyPr rtlCol="0" anchor="ctr"/>
+            <a:lstStyle/>
+            <a:p>
+              <a:pPr algn="ctr"/>
+              <a:endParaRPr lang="en-US"/>
+            </a:p>
+          </p:txBody>
+        </p:sp>
+      </p:grpSp>
+      <p:sp>
+        <p:nvSpPr>
+          <p:cNvPr id="17" name="Rectangle 16">
+            <a:extLst>
+              <a:ext uri="{FF2B5EF4-FFF2-40B4-BE49-F238E27FC236}">
+                <a16:creationId xmlns:a16="http://schemas.microsoft.com/office/drawing/2014/main" id="{3873B707-463F-40B0-8227-E8CC6C67EB25}"/>
+              </a:ext>
+              <a:ext uri="{C183D7F6-B498-43B3-948B-1728B52AA6E4}">
+                <adec:decorative xmlns:adec="http://schemas.microsoft.com/office/drawing/2017/decorative" val="1"/>
+              </a:ext>
+            </a:extLst>
+          </p:cNvPr>
+          <p:cNvSpPr>
+            <a:spLocks noGrp="1" noRot="1" noChangeAspect="1" noMove="1" noResize="1" noEditPoints="1" noAdjustHandles="1" noChangeArrowheads="1" noChangeShapeType="1" noTextEdit="1"/>
+          </p:cNvSpPr>
+          <p:nvPr>
+            <p:extLst>
+              <p:ext uri="{386F3935-93C4-4BCD-93E2-E3B085C9AB24}">
+                <p16:designElem xmlns:p16="http://schemas.microsoft.com/office/powerpoint/2015/main" val="1"/>
+              </p:ext>
+            </p:extLst>
+          </p:nvPr>
+        </p:nvSpPr>
+        <p:spPr>
+          <a:xfrm flipH="1">
+            <a:off x="665085" y="2090569"/>
+            <a:ext cx="4297680" cy="27432"/>
+          </a:xfrm>
+          <a:prstGeom prst="rect">
+            <a:avLst/>
+          </a:prstGeom>
+          <a:solidFill>
+            <a:schemeClr val="accent4"/>
+          </a:solidFill>
+          <a:ln>
+            <a:noFill/>
+          </a:ln>
+        </p:spPr>
+        <p:style>
+          <a:lnRef idx="2">
+            <a:schemeClr val="accent1">
+              <a:shade val="50000"/>
+            </a:schemeClr>
+          </a:lnRef>
+          <a:fillRef idx="1">
+            <a:schemeClr val="accent1"/>
+          </a:fillRef>
+          <a:effectRef idx="0">
+            <a:schemeClr val="accent1"/>
+          </a:effectRef>
+          <a:fontRef idx="minor">
+            <a:schemeClr val="lt1"/>
+          </a:fontRef>
+        </p:style>
+        <p:txBody>
+          <a:bodyPr rtlCol="0" anchor="ctr"/>
+          <a:lstStyle/>
+          <a:p>
+            <a:pPr algn="ctr"/>
+            <a:endParaRPr lang="en-US"/>
+          </a:p>
+        </p:txBody>
+      </p:sp>
+      <p:sp>
+        <p:nvSpPr>
+          <p:cNvPr id="8" name="Content Placeholder 7">
+            <a:extLst>
+              <a:ext uri="{FF2B5EF4-FFF2-40B4-BE49-F238E27FC236}">
+                <a16:creationId xmlns:a16="http://schemas.microsoft.com/office/drawing/2014/main" id="{9866B5DB-FBA5-A3F7-97CE-27C6E04CE77C}"/>
+              </a:ext>
+            </a:extLst>
+          </p:cNvPr>
+          <p:cNvSpPr>
+            <a:spLocks noGrp="1"/>
+          </p:cNvSpPr>
+          <p:nvPr>
+            <p:ph idx="1"/>
+          </p:nvPr>
+        </p:nvSpPr>
+        <p:spPr>
+          <a:xfrm>
+            <a:off x="590719" y="2330505"/>
+            <a:ext cx="4559425" cy="3979585"/>
+          </a:xfrm>
+        </p:spPr>
+        <p:txBody>
+          <a:bodyPr anchor="ctr">
+            <a:normAutofit/>
+          </a:bodyPr>
+          <a:lstStyle/>
+          <a:p>
+            <a:endParaRPr lang="en-US" sz="2000" dirty="0"/>
+          </a:p>
+        </p:txBody>
+      </p:sp>
+      <p:sp>
+        <p:nvSpPr>
+          <p:cNvPr id="19" name="Rectangle 18">
+            <a:extLst>
+              <a:ext uri="{FF2B5EF4-FFF2-40B4-BE49-F238E27FC236}">
+                <a16:creationId xmlns:a16="http://schemas.microsoft.com/office/drawing/2014/main" id="{C13237C8-E62C-4F0D-A318-BD6FB6C2D138}"/>
+              </a:ext>
+              <a:ext uri="{C183D7F6-B498-43B3-948B-1728B52AA6E4}">
+                <adec:decorative xmlns:adec="http://schemas.microsoft.com/office/drawing/2017/decorative" val="1"/>
+              </a:ext>
+            </a:extLst>
+          </p:cNvPr>
+          <p:cNvSpPr>
+            <a:spLocks noGrp="1" noRot="1" noChangeAspect="1" noMove="1" noResize="1" noEditPoints="1" noAdjustHandles="1" noChangeArrowheads="1" noChangeShapeType="1" noTextEdit="1"/>
+          </p:cNvSpPr>
+          <p:nvPr>
+            <p:extLst>
+              <p:ext uri="{386F3935-93C4-4BCD-93E2-E3B085C9AB24}">
+                <p16:designElem xmlns:p16="http://schemas.microsoft.com/office/powerpoint/2015/main" val="1"/>
+              </p:ext>
+            </p:extLst>
+          </p:nvPr>
+        </p:nvSpPr>
+        <p:spPr>
+          <a:xfrm flipH="1">
+            <a:off x="10697670" y="0"/>
+            <a:ext cx="1494330" cy="6858000"/>
+          </a:xfrm>
+          <a:prstGeom prst="rect">
+            <a:avLst/>
+          </a:prstGeom>
+          <a:solidFill>
+            <a:schemeClr val="accent4"/>
+          </a:solidFill>
+          <a:ln>
+            <a:noFill/>
+          </a:ln>
+        </p:spPr>
+        <p:style>
+          <a:lnRef idx="2">
+            <a:schemeClr val="accent1">
+              <a:shade val="50000"/>
+            </a:schemeClr>
+          </a:lnRef>
+          <a:fillRef idx="1">
+            <a:schemeClr val="accent1"/>
+          </a:fillRef>
+          <a:effectRef idx="0">
+            <a:schemeClr val="accent1"/>
+          </a:effectRef>
+          <a:fontRef idx="minor">
+            <a:schemeClr val="lt1"/>
+          </a:fontRef>
+        </p:style>
+        <p:txBody>
+          <a:bodyPr rtlCol="0" anchor="ctr"/>
+          <a:lstStyle/>
+          <a:p>
+            <a:pPr algn="ctr"/>
+            <a:endParaRPr lang="en-US"/>
+          </a:p>
+        </p:txBody>
+      </p:sp>
+      <p:sp>
+        <p:nvSpPr>
+          <p:cNvPr id="21" name="Rectangle 20">
+            <a:extLst>
+              <a:ext uri="{FF2B5EF4-FFF2-40B4-BE49-F238E27FC236}">
+                <a16:creationId xmlns:a16="http://schemas.microsoft.com/office/drawing/2014/main" id="{19C9EAEA-39D0-4B0E-A0EB-51E7B26740B1}"/>
+              </a:ext>
+              <a:ext uri="{C183D7F6-B498-43B3-948B-1728B52AA6E4}">
+                <adec:decorative xmlns:adec="http://schemas.microsoft.com/office/drawing/2017/decorative" val="1"/>
+              </a:ext>
+            </a:extLst>
+          </p:cNvPr>
+          <p:cNvSpPr>
+            <a:spLocks noGrp="1" noRot="1" noChangeAspect="1" noMove="1" noResize="1" noEditPoints="1" noAdjustHandles="1" noChangeArrowheads="1" noChangeShapeType="1" noTextEdit="1"/>
+          </p:cNvSpPr>
+          <p:nvPr>
+            <p:extLst>
+              <p:ext uri="{386F3935-93C4-4BCD-93E2-E3B085C9AB24}">
+                <p16:designElem xmlns:p16="http://schemas.microsoft.com/office/powerpoint/2015/main" val="1"/>
+              </p:ext>
+            </p:extLst>
+          </p:nvPr>
+        </p:nvSpPr>
+        <p:spPr>
+          <a:xfrm>
+            <a:off x="5685810" y="513853"/>
+            <a:ext cx="6009366" cy="5834577"/>
+          </a:xfrm>
+          <a:prstGeom prst="rect">
+            <a:avLst/>
+          </a:prstGeom>
+          <a:solidFill>
+            <a:schemeClr val="bg1"/>
+          </a:solidFill>
+          <a:ln>
+            <a:noFill/>
+          </a:ln>
+          <a:effectLst>
+            <a:outerShdw blurRad="139700" dist="127000" dir="5400000" algn="t" rotWithShape="0">
+              <a:prstClr val="black">
+                <a:alpha val="15000"/>
+              </a:prstClr>
+            </a:outerShdw>
+          </a:effectLst>
+        </p:spPr>
+        <p:style>
+          <a:lnRef idx="2">
+            <a:schemeClr val="accent1">
+              <a:shade val="50000"/>
+            </a:schemeClr>
+          </a:lnRef>
+          <a:fillRef idx="1">
+            <a:schemeClr val="accent1"/>
+          </a:fillRef>
+          <a:effectRef idx="0">
+            <a:schemeClr val="accent1"/>
+          </a:effectRef>
+          <a:fontRef idx="minor">
+            <a:schemeClr val="lt1"/>
+          </a:fontRef>
+        </p:style>
+        <p:txBody>
+          <a:bodyPr rtlCol="0" anchor="ctr"/>
+          <a:lstStyle/>
+          <a:p>
+            <a:pPr algn="ctr"/>
+            <a:endParaRPr lang="en-US"/>
+          </a:p>
+        </p:txBody>
+      </p:sp>
+      <p:pic>
+        <p:nvPicPr>
+          <p:cNvPr id="4" name="내용 개체 틀 3">
+            <a:extLst>
+              <a:ext uri="{FF2B5EF4-FFF2-40B4-BE49-F238E27FC236}">
+                <a16:creationId xmlns:a16="http://schemas.microsoft.com/office/drawing/2014/main" id="{026F7DF3-E713-14F0-F0FD-838D41E7AF7F}"/>
+              </a:ext>
+            </a:extLst>
+          </p:cNvPr>
+          <p:cNvPicPr>
+            <a:picLocks noChangeAspect="1"/>
+          </p:cNvPicPr>
+          <p:nvPr/>
+        </p:nvPicPr>
+        <p:blipFill rotWithShape="1">
+          <a:blip r:embed="rId2"/>
+          <a:srcRect t="4274" r="-2" b="-2"/>
+          <a:stretch/>
+        </p:blipFill>
+        <p:spPr>
+          <a:xfrm>
+            <a:off x="5627851" y="224071"/>
+            <a:ext cx="6404808" cy="6297045"/>
+          </a:xfrm>
+          <a:prstGeom prst="rect">
+            <a:avLst/>
+          </a:prstGeom>
+        </p:spPr>
+      </p:pic>
+    </p:spTree>
+    <p:extLst>
+      <p:ext uri="{BB962C8B-B14F-4D97-AF65-F5344CB8AC3E}">
+        <p14:creationId xmlns:p14="http://schemas.microsoft.com/office/powerpoint/2010/main" val="1258406727"/>
+      </p:ext>
+    </p:extLst>
+  </p:cSld>
+  <p:clrMapOvr>
+    <a:masterClrMapping/>
+  </p:clrMapOvr>
+</p:sld>
+</file>
+
+<file path=ppt/slides/slide7.xml><?xml version="1.0" encoding="utf-8"?>
+<p:sld xmlns:a="http://schemas.openxmlformats.org/drawingml/2006/main" xmlns:r="http://schemas.openxmlformats.org/officeDocument/2006/relationships" xmlns:p="http://schemas.openxmlformats.org/presentationml/2006/main">
+  <p:cSld>
     <p:spTree>
       <p:nvGrpSpPr>
         <p:cNvPr id="1" name=""/>
@@ -5735,7 +6946,7 @@
 </p:sld>
 </file>
 
-<file path=ppt/slides/slide7.xml><?xml version="1.0" encoding="utf-8"?>
+<file path=ppt/slides/slide8.xml><?xml version="1.0" encoding="utf-8"?>
 <p:sld xmlns:a="http://schemas.openxmlformats.org/drawingml/2006/main" xmlns:r="http://schemas.openxmlformats.org/officeDocument/2006/relationships" xmlns:p="http://schemas.openxmlformats.org/presentationml/2006/main">
   <p:cSld>
     <p:bg>
@@ -5825,7 +7036,7 @@
           <p:cNvPr id="2" name="제목 1">
             <a:extLst>
               <a:ext uri="{FF2B5EF4-FFF2-40B4-BE49-F238E27FC236}">
-                <a16:creationId xmlns:a16="http://schemas.microsoft.com/office/drawing/2014/main" id="{CE84C102-3BC8-8288-1F74-87537FD5EAD9}"/>
+                <a16:creationId xmlns:a16="http://schemas.microsoft.com/office/drawing/2014/main" id="{51101ECD-AC86-E37C-EA38-88B08BCF9273}"/>
               </a:ext>
             </a:extLst>
           </p:cNvPr>
@@ -5838,7 +7049,7 @@
         </p:nvSpPr>
         <p:spPr>
           <a:xfrm>
-            <a:off x="645064" y="525982"/>
+            <a:off x="310234" y="-216"/>
             <a:ext cx="4282983" cy="1200361"/>
           </a:xfrm>
         </p:spPr>
@@ -5849,8 +7060,12 @@
           <a:lstStyle/>
           <a:p>
             <a:r>
+              <a:rPr lang="en-US" altLang="ko-KR" sz="3600" dirty="0"/>
+              <a:t>Main </a:t>
+            </a:r>
+            <a:r>
               <a:rPr lang="ko-KR" altLang="en-US" sz="3600" dirty="0"/>
-              <a:t>트리 생성</a:t>
+              <a:t>함수</a:t>
             </a:r>
           </a:p>
         </p:txBody>
@@ -5915,38 +7130,6 @@
           <a:p>
             <a:pPr algn="ctr"/>
             <a:endParaRPr lang="en-US"/>
-          </a:p>
-        </p:txBody>
-      </p:sp>
-      <p:sp>
-        <p:nvSpPr>
-          <p:cNvPr id="9" name="Content Placeholder 8">
-            <a:extLst>
-              <a:ext uri="{FF2B5EF4-FFF2-40B4-BE49-F238E27FC236}">
-                <a16:creationId xmlns:a16="http://schemas.microsoft.com/office/drawing/2014/main" id="{844B3BDD-4037-DFCB-E3E8-01D0619BC9A2}"/>
-              </a:ext>
-            </a:extLst>
-          </p:cNvPr>
-          <p:cNvSpPr>
-            <a:spLocks noGrp="1"/>
-          </p:cNvSpPr>
-          <p:nvPr>
-            <p:ph idx="1"/>
-          </p:nvPr>
-        </p:nvSpPr>
-        <p:spPr>
-          <a:xfrm>
-            <a:off x="645066" y="2031101"/>
-            <a:ext cx="4282984" cy="3511943"/>
-          </a:xfrm>
-        </p:spPr>
-        <p:txBody>
-          <a:bodyPr anchor="ctr">
-            <a:normAutofit/>
-          </a:bodyPr>
-          <a:lstStyle/>
-          <a:p>
-            <a:endParaRPr lang="en-US" sz="1800"/>
           </a:p>
         </p:txBody>
       </p:sp>
@@ -6151,7 +7334,7 @@
           <p:cNvPr id="10" name="그림 9">
             <a:extLst>
               <a:ext uri="{FF2B5EF4-FFF2-40B4-BE49-F238E27FC236}">
-                <a16:creationId xmlns:a16="http://schemas.microsoft.com/office/drawing/2014/main" id="{1F64A983-8A74-5AAD-5762-6836BC250EE9}"/>
+                <a16:creationId xmlns:a16="http://schemas.microsoft.com/office/drawing/2014/main" id="{68195824-E267-9D61-7248-EF86161A5E89}"/>
               </a:ext>
             </a:extLst>
           </p:cNvPr>
@@ -6168,18 +7351,214 @@
         </p:blipFill>
         <p:spPr>
           <a:xfrm>
-            <a:off x="5559835" y="91585"/>
-            <a:ext cx="5987099" cy="6674193"/>
+            <a:off x="5573116" y="50930"/>
+            <a:ext cx="5378146" cy="6755504"/>
           </a:xfrm>
           <a:prstGeom prst="rect">
             <a:avLst/>
           </a:prstGeom>
         </p:spPr>
       </p:pic>
+      <p:sp>
+        <p:nvSpPr>
+          <p:cNvPr id="3" name="제목 1">
+            <a:extLst>
+              <a:ext uri="{FF2B5EF4-FFF2-40B4-BE49-F238E27FC236}">
+                <a16:creationId xmlns:a16="http://schemas.microsoft.com/office/drawing/2014/main" id="{57BE7095-FB27-DB61-75C1-5EC57BFBDA9A}"/>
+              </a:ext>
+            </a:extLst>
+          </p:cNvPr>
+          <p:cNvSpPr txBox="1">
+            <a:spLocks/>
+          </p:cNvSpPr>
+          <p:nvPr/>
+        </p:nvSpPr>
+        <p:spPr>
+          <a:xfrm>
+            <a:off x="221551" y="1350033"/>
+            <a:ext cx="1668887" cy="635616"/>
+          </a:xfrm>
+          <a:prstGeom prst="rect">
+            <a:avLst/>
+          </a:prstGeom>
+        </p:spPr>
+        <p:txBody>
+          <a:bodyPr vert="horz" lIns="91440" tIns="45720" rIns="91440" bIns="45720" rtlCol="0" anchor="ctr">
+            <a:normAutofit fontScale="92500" lnSpcReduction="10000"/>
+          </a:bodyPr>
+          <a:lstStyle>
+            <a:lvl1pPr algn="l" defTabSz="914400" rtl="0" eaLnBrk="1" latinLnBrk="1" hangingPunct="1">
+              <a:lnSpc>
+                <a:spcPct val="90000"/>
+              </a:lnSpc>
+              <a:spcBef>
+                <a:spcPct val="0"/>
+              </a:spcBef>
+              <a:buNone/>
+              <a:defRPr sz="4400" kern="1200">
+                <a:solidFill>
+                  <a:schemeClr val="tx1"/>
+                </a:solidFill>
+                <a:latin typeface="+mj-lt"/>
+                <a:ea typeface="+mj-ea"/>
+                <a:cs typeface="+mj-cs"/>
+              </a:defRPr>
+            </a:lvl1pPr>
+          </a:lstStyle>
+          <a:p>
+            <a:r>
+              <a:rPr lang="en-US" altLang="ko-KR" dirty="0"/>
+              <a:t>A B C</a:t>
+            </a:r>
+            <a:endParaRPr lang="ko-KR" altLang="en-US" dirty="0"/>
+          </a:p>
+        </p:txBody>
+      </p:sp>
+      <p:pic>
+        <p:nvPicPr>
+          <p:cNvPr id="5" name="내용 개체 틀 4" descr="원, 스케치, 그림, 도표이(가) 표시된 사진&#10;&#10;자동 생성된 설명">
+            <a:extLst>
+              <a:ext uri="{FF2B5EF4-FFF2-40B4-BE49-F238E27FC236}">
+                <a16:creationId xmlns:a16="http://schemas.microsoft.com/office/drawing/2014/main" id="{2B8CCD7F-13B0-34C8-4EC5-D18A004413A2}"/>
+              </a:ext>
+            </a:extLst>
+          </p:cNvPr>
+          <p:cNvPicPr>
+            <a:picLocks noChangeAspect="1"/>
+          </p:cNvPicPr>
+          <p:nvPr/>
+        </p:nvPicPr>
+        <p:blipFill rotWithShape="1">
+          <a:blip r:embed="rId3"/>
+          <a:srcRect r="1" b="304"/>
+          <a:stretch/>
+        </p:blipFill>
+        <p:spPr>
+          <a:xfrm>
+            <a:off x="422287" y="2081550"/>
+            <a:ext cx="4660879" cy="3552045"/>
+          </a:xfrm>
+          <a:custGeom>
+            <a:avLst/>
+            <a:gdLst/>
+            <a:ahLst/>
+            <a:cxnLst/>
+            <a:rect l="l" t="t" r="r" b="b"/>
+            <a:pathLst>
+              <a:path w="6878775" h="6858000">
+                <a:moveTo>
+                  <a:pt x="1102973" y="0"/>
+                </a:moveTo>
+                <a:lnTo>
+                  <a:pt x="1160688" y="0"/>
+                </a:lnTo>
+                <a:lnTo>
+                  <a:pt x="983189" y="331786"/>
+                </a:lnTo>
+                <a:cubicBezTo>
+                  <a:pt x="914866" y="469145"/>
+                  <a:pt x="850355" y="608712"/>
+                  <a:pt x="789261" y="750263"/>
+                </a:cubicBezTo>
+                <a:cubicBezTo>
+                  <a:pt x="774307" y="784928"/>
+                  <a:pt x="759992" y="819849"/>
+                  <a:pt x="745295" y="854514"/>
+                </a:cubicBezTo>
+                <a:cubicBezTo>
+                  <a:pt x="756682" y="845393"/>
+                  <a:pt x="765489" y="833492"/>
+                  <a:pt x="770857" y="819975"/>
+                </a:cubicBezTo>
+                <a:cubicBezTo>
+                  <a:pt x="879943" y="589569"/>
+                  <a:pt x="999605" y="365513"/>
+                  <a:pt x="1131329" y="148742"/>
+                </a:cubicBezTo>
+                <a:lnTo>
+                  <a:pt x="1227589" y="0"/>
+                </a:lnTo>
+                <a:lnTo>
+                  <a:pt x="6878775" y="0"/>
+                </a:lnTo>
+                <a:lnTo>
+                  <a:pt x="6878775" y="6858000"/>
+                </a:lnTo>
+                <a:lnTo>
+                  <a:pt x="713521" y="6858000"/>
+                </a:lnTo>
+                <a:lnTo>
+                  <a:pt x="625642" y="6670527"/>
+                </a:lnTo>
+                <a:cubicBezTo>
+                  <a:pt x="507232" y="6398531"/>
+                  <a:pt x="403083" y="6118381"/>
+                  <a:pt x="312785" y="5830359"/>
+                </a:cubicBezTo>
+                <a:cubicBezTo>
+                  <a:pt x="278149" y="5719759"/>
+                  <a:pt x="248879" y="5607635"/>
+                  <a:pt x="212198" y="5480401"/>
+                </a:cubicBezTo>
+                <a:cubicBezTo>
+                  <a:pt x="212208" y="5491601"/>
+                  <a:pt x="212803" y="5502788"/>
+                  <a:pt x="213988" y="5513923"/>
+                </a:cubicBezTo>
+                <a:cubicBezTo>
+                  <a:pt x="264089" y="5723695"/>
+                  <a:pt x="307290" y="5935370"/>
+                  <a:pt x="365826" y="6142729"/>
+                </a:cubicBezTo>
+                <a:cubicBezTo>
+                  <a:pt x="433152" y="6380817"/>
+                  <a:pt x="510068" y="6614016"/>
+                  <a:pt x="597975" y="6841549"/>
+                </a:cubicBezTo>
+                <a:lnTo>
+                  <a:pt x="604824" y="6858000"/>
+                </a:lnTo>
+                <a:lnTo>
+                  <a:pt x="552056" y="6858000"/>
+                </a:lnTo>
+                <a:lnTo>
+                  <a:pt x="539576" y="6828295"/>
+                </a:lnTo>
+                <a:cubicBezTo>
+                  <a:pt x="380597" y="6414594"/>
+                  <a:pt x="260223" y="5988893"/>
+                  <a:pt x="171555" y="5552906"/>
+                </a:cubicBezTo>
+                <a:cubicBezTo>
+                  <a:pt x="91163" y="5157998"/>
+                  <a:pt x="43746" y="4758899"/>
+                  <a:pt x="12305" y="4357388"/>
+                </a:cubicBezTo>
+                <a:cubicBezTo>
+                  <a:pt x="-14281" y="4013908"/>
+                  <a:pt x="4507" y="3672965"/>
+                  <a:pt x="46684" y="3331516"/>
+                </a:cubicBezTo>
+                <a:cubicBezTo>
+                  <a:pt x="127203" y="2664286"/>
+                  <a:pt x="277819" y="2007265"/>
+                  <a:pt x="496065" y="1371196"/>
+                </a:cubicBezTo>
+                <a:cubicBezTo>
+                  <a:pt x="636273" y="966066"/>
+                  <a:pt x="800445" y="573253"/>
+                  <a:pt x="995723" y="196614"/>
+                </a:cubicBezTo>
+                <a:close/>
+              </a:path>
+            </a:pathLst>
+          </a:custGeom>
+        </p:spPr>
+      </p:pic>
     </p:spTree>
     <p:extLst>
       <p:ext uri="{BB962C8B-B14F-4D97-AF65-F5344CB8AC3E}">
-        <p14:creationId xmlns:p14="http://schemas.microsoft.com/office/powerpoint/2010/main" val="133315169"/>
+        <p14:creationId xmlns:p14="http://schemas.microsoft.com/office/powerpoint/2010/main" val="3242079656"/>
       </p:ext>
     </p:extLst>
   </p:cSld>
@@ -6189,17 +7568,9 @@
 </p:sld>
 </file>
 
-<file path=ppt/slides/slide8.xml><?xml version="1.0" encoding="utf-8"?>
+<file path=ppt/slides/slide9.xml><?xml version="1.0" encoding="utf-8"?>
 <p:sld xmlns:a="http://schemas.openxmlformats.org/drawingml/2006/main" xmlns:r="http://schemas.openxmlformats.org/officeDocument/2006/relationships" xmlns:p="http://schemas.openxmlformats.org/presentationml/2006/main">
   <p:cSld>
-    <p:bg>
-      <p:bgPr>
-        <a:solidFill>
-          <a:schemeClr val="bg1"/>
-        </a:solidFill>
-        <a:effectLst/>
-      </p:bgPr>
-    </p:bg>
     <p:spTree>
       <p:nvGrpSpPr>
         <p:cNvPr id="1" name=""/>
@@ -6214,72 +7585,12 @@
           <a:chExt cx="0" cy="0"/>
         </a:xfrm>
       </p:grpSpPr>
-      <p:sp useBgFill="1">
-        <p:nvSpPr>
-          <p:cNvPr id="11" name="Rectangle 10">
-            <a:extLst>
-              <a:ext uri="{FF2B5EF4-FFF2-40B4-BE49-F238E27FC236}">
-                <a16:creationId xmlns:a16="http://schemas.microsoft.com/office/drawing/2014/main" id="{201CC55D-ED54-4C5C-95E6-10947BD1103B}"/>
-              </a:ext>
-              <a:ext uri="{C183D7F6-B498-43B3-948B-1728B52AA6E4}">
-                <adec:decorative xmlns:adec="http://schemas.microsoft.com/office/drawing/2017/decorative" val="1"/>
-              </a:ext>
-            </a:extLst>
-          </p:cNvPr>
-          <p:cNvSpPr>
-            <a:spLocks noGrp="1" noRot="1" noChangeAspect="1" noMove="1" noResize="1" noEditPoints="1" noAdjustHandles="1" noChangeArrowheads="1" noChangeShapeType="1" noTextEdit="1"/>
-          </p:cNvSpPr>
-          <p:nvPr>
-            <p:extLst>
-              <p:ext uri="{386F3935-93C4-4BCD-93E2-E3B085C9AB24}">
-                <p16:designElem xmlns:p16="http://schemas.microsoft.com/office/powerpoint/2015/main" val="1"/>
-              </p:ext>
-            </p:extLst>
-          </p:nvPr>
-        </p:nvSpPr>
-        <p:spPr>
-          <a:xfrm>
-            <a:off x="0" y="0"/>
-            <a:ext cx="12191999" cy="6857365"/>
-          </a:xfrm>
-          <a:prstGeom prst="rect">
-            <a:avLst/>
-          </a:prstGeom>
-          <a:ln>
-            <a:noFill/>
-          </a:ln>
-        </p:spPr>
-        <p:style>
-          <a:lnRef idx="2">
-            <a:schemeClr val="accent1">
-              <a:shade val="50000"/>
-            </a:schemeClr>
-          </a:lnRef>
-          <a:fillRef idx="1">
-            <a:schemeClr val="accent1"/>
-          </a:fillRef>
-          <a:effectRef idx="0">
-            <a:schemeClr val="accent1"/>
-          </a:effectRef>
-          <a:fontRef idx="minor">
-            <a:schemeClr val="lt1"/>
-          </a:fontRef>
-        </p:style>
-        <p:txBody>
-          <a:bodyPr rtlCol="0" anchor="ctr"/>
-          <a:lstStyle/>
-          <a:p>
-            <a:pPr algn="ctr"/>
-            <a:endParaRPr lang="en-US"/>
-          </a:p>
-        </p:txBody>
-      </p:sp>
       <p:sp>
         <p:nvSpPr>
           <p:cNvPr id="2" name="제목 1">
             <a:extLst>
               <a:ext uri="{FF2B5EF4-FFF2-40B4-BE49-F238E27FC236}">
-                <a16:creationId xmlns:a16="http://schemas.microsoft.com/office/drawing/2014/main" id="{0A827646-DFF8-B4E8-3DFC-4E370BD11ABD}"/>
+                <a16:creationId xmlns:a16="http://schemas.microsoft.com/office/drawing/2014/main" id="{5BE9E106-6E8F-6BF4-C798-9F99BADBB14C}"/>
               </a:ext>
             </a:extLst>
           </p:cNvPr>
@@ -6290,264 +7601,21 @@
             <p:ph type="title"/>
           </p:nvPr>
         </p:nvSpPr>
-        <p:spPr>
-          <a:xfrm>
-            <a:off x="589560" y="856180"/>
-            <a:ext cx="4560584" cy="1128068"/>
-          </a:xfrm>
-        </p:spPr>
-        <p:txBody>
-          <a:bodyPr anchor="ctr">
-            <a:normAutofit/>
-          </a:bodyPr>
-          <a:lstStyle/>
-          <a:p>
-            <a:r>
-              <a:rPr lang="ko-KR" altLang="en-US" sz="4000" dirty="0"/>
-              <a:t>전위</a:t>
-            </a:r>
-            <a:r>
-              <a:rPr lang="en-US" altLang="ko-KR" sz="4000" dirty="0"/>
-              <a:t>, </a:t>
-            </a:r>
-            <a:r>
-              <a:rPr lang="ko-KR" altLang="en-US" sz="4000" dirty="0"/>
-              <a:t>중위</a:t>
-            </a:r>
-            <a:r>
-              <a:rPr lang="en-US" altLang="ko-KR" sz="4000" dirty="0"/>
-              <a:t>,</a:t>
-            </a:r>
-            <a:r>
-              <a:rPr lang="ko-KR" altLang="en-US" sz="4000" dirty="0"/>
-              <a:t> 후위</a:t>
-            </a:r>
-          </a:p>
-        </p:txBody>
-      </p:sp>
-      <p:grpSp>
-        <p:nvGrpSpPr>
-          <p:cNvPr id="13" name="Group 12">
-            <a:extLst>
-              <a:ext uri="{FF2B5EF4-FFF2-40B4-BE49-F238E27FC236}">
-                <a16:creationId xmlns:a16="http://schemas.microsoft.com/office/drawing/2014/main" id="{1DE889C7-FAD6-4397-98E2-05D503484459}"/>
-              </a:ext>
-              <a:ext uri="{C183D7F6-B498-43B3-948B-1728B52AA6E4}">
-                <adec:decorative xmlns:adec="http://schemas.microsoft.com/office/drawing/2017/decorative" val="1"/>
-              </a:ext>
-            </a:extLst>
-          </p:cNvPr>
-          <p:cNvGrpSpPr>
-            <a:grpSpLocks noGrp="1" noUngrp="1" noRot="1" noChangeAspect="1" noMove="1" noResize="1"/>
-          </p:cNvGrpSpPr>
-          <p:nvPr>
-            <p:extLst>
-              <p:ext uri="{386F3935-93C4-4BCD-93E2-E3B085C9AB24}">
-                <p16:designElem xmlns:p16="http://schemas.microsoft.com/office/powerpoint/2015/main" val="1"/>
-              </p:ext>
-            </p:extLst>
-          </p:nvPr>
-        </p:nvGrpSpPr>
-        <p:grpSpPr>
-          <a:xfrm>
-            <a:off x="0" y="1083484"/>
-            <a:ext cx="355196" cy="673460"/>
-            <a:chOff x="0" y="823811"/>
-            <a:chExt cx="355196" cy="673460"/>
-          </a:xfrm>
-        </p:grpSpPr>
-        <p:sp>
-          <p:nvSpPr>
-            <p:cNvPr id="14" name="Rectangle 13">
-              <a:extLst>
-                <a:ext uri="{FF2B5EF4-FFF2-40B4-BE49-F238E27FC236}">
-                  <a16:creationId xmlns:a16="http://schemas.microsoft.com/office/drawing/2014/main" id="{F399A70F-F8CD-4992-9EF5-6CF15472E73F}"/>
-                </a:ext>
-                <a:ext uri="{C183D7F6-B498-43B3-948B-1728B52AA6E4}">
-                  <adec:decorative xmlns:adec="http://schemas.microsoft.com/office/drawing/2017/decorative" val="1"/>
-                </a:ext>
-              </a:extLst>
-            </p:cNvPr>
-            <p:cNvSpPr/>
-            <p:nvPr>
-              <p:extLst>
-                <p:ext uri="{386F3935-93C4-4BCD-93E2-E3B085C9AB24}">
-                  <p16:designElem xmlns:p16="http://schemas.microsoft.com/office/powerpoint/2015/main" val="1"/>
-                </p:ext>
-              </p:extLst>
-            </p:nvPr>
-          </p:nvSpPr>
-          <p:spPr>
-            <a:xfrm>
-              <a:off x="0" y="823811"/>
-              <a:ext cx="87363" cy="673460"/>
-            </a:xfrm>
-            <a:prstGeom prst="rect">
-              <a:avLst/>
-            </a:prstGeom>
-            <a:solidFill>
-              <a:schemeClr val="accent4"/>
-            </a:solidFill>
-            <a:ln>
-              <a:noFill/>
-            </a:ln>
-          </p:spPr>
-          <p:style>
-            <a:lnRef idx="2">
-              <a:schemeClr val="accent1">
-                <a:shade val="50000"/>
-              </a:schemeClr>
-            </a:lnRef>
-            <a:fillRef idx="1">
-              <a:schemeClr val="accent1"/>
-            </a:fillRef>
-            <a:effectRef idx="0">
-              <a:schemeClr val="accent1"/>
-            </a:effectRef>
-            <a:fontRef idx="minor">
-              <a:schemeClr val="lt1"/>
-            </a:fontRef>
-          </p:style>
-          <p:txBody>
-            <a:bodyPr rtlCol="0" anchor="ctr"/>
-            <a:lstStyle/>
-            <a:p>
-              <a:pPr algn="ctr"/>
-              <a:endParaRPr lang="en-US"/>
-            </a:p>
-          </p:txBody>
-        </p:sp>
-        <p:sp>
-          <p:nvSpPr>
-            <p:cNvPr id="15" name="Rectangle 14">
-              <a:extLst>
-                <a:ext uri="{FF2B5EF4-FFF2-40B4-BE49-F238E27FC236}">
-                  <a16:creationId xmlns:a16="http://schemas.microsoft.com/office/drawing/2014/main" id="{48F4FEDC-6D80-458C-A665-075D9B9500FD}"/>
-                </a:ext>
-                <a:ext uri="{C183D7F6-B498-43B3-948B-1728B52AA6E4}">
-                  <adec:decorative xmlns:adec="http://schemas.microsoft.com/office/drawing/2017/decorative" val="1"/>
-                </a:ext>
-              </a:extLst>
-            </p:cNvPr>
-            <p:cNvSpPr/>
-            <p:nvPr>
-              <p:extLst>
-                <p:ext uri="{386F3935-93C4-4BCD-93E2-E3B085C9AB24}">
-                  <p16:designElem xmlns:p16="http://schemas.microsoft.com/office/powerpoint/2015/main" val="1"/>
-                </p:ext>
-              </p:extLst>
-            </p:nvPr>
-          </p:nvSpPr>
-          <p:spPr>
-            <a:xfrm>
-              <a:off x="159341" y="823811"/>
-              <a:ext cx="195855" cy="673460"/>
-            </a:xfrm>
-            <a:prstGeom prst="rect">
-              <a:avLst/>
-            </a:prstGeom>
-            <a:solidFill>
-              <a:schemeClr val="accent4"/>
-            </a:solidFill>
-            <a:ln>
-              <a:noFill/>
-            </a:ln>
-          </p:spPr>
-          <p:style>
-            <a:lnRef idx="2">
-              <a:schemeClr val="accent1">
-                <a:shade val="50000"/>
-              </a:schemeClr>
-            </a:lnRef>
-            <a:fillRef idx="1">
-              <a:schemeClr val="accent1"/>
-            </a:fillRef>
-            <a:effectRef idx="0">
-              <a:schemeClr val="accent1"/>
-            </a:effectRef>
-            <a:fontRef idx="minor">
-              <a:schemeClr val="lt1"/>
-            </a:fontRef>
-          </p:style>
-          <p:txBody>
-            <a:bodyPr rtlCol="0" anchor="ctr"/>
-            <a:lstStyle/>
-            <a:p>
-              <a:pPr algn="ctr"/>
-              <a:endParaRPr lang="en-US"/>
-            </a:p>
-          </p:txBody>
-        </p:sp>
-      </p:grpSp>
-      <p:sp>
-        <p:nvSpPr>
-          <p:cNvPr id="17" name="Rectangle 16">
-            <a:extLst>
-              <a:ext uri="{FF2B5EF4-FFF2-40B4-BE49-F238E27FC236}">
-                <a16:creationId xmlns:a16="http://schemas.microsoft.com/office/drawing/2014/main" id="{3873B707-463F-40B0-8227-E8CC6C67EB25}"/>
-              </a:ext>
-              <a:ext uri="{C183D7F6-B498-43B3-948B-1728B52AA6E4}">
-                <adec:decorative xmlns:adec="http://schemas.microsoft.com/office/drawing/2017/decorative" val="1"/>
-              </a:ext>
-            </a:extLst>
-          </p:cNvPr>
-          <p:cNvSpPr>
-            <a:spLocks noGrp="1" noRot="1" noChangeAspect="1" noMove="1" noResize="1" noEditPoints="1" noAdjustHandles="1" noChangeArrowheads="1" noChangeShapeType="1" noTextEdit="1"/>
-          </p:cNvSpPr>
-          <p:nvPr>
-            <p:extLst>
-              <p:ext uri="{386F3935-93C4-4BCD-93E2-E3B085C9AB24}">
-                <p16:designElem xmlns:p16="http://schemas.microsoft.com/office/powerpoint/2015/main" val="1"/>
-              </p:ext>
-            </p:extLst>
-          </p:nvPr>
-        </p:nvSpPr>
-        <p:spPr>
-          <a:xfrm flipH="1">
-            <a:off x="665085" y="2090569"/>
-            <a:ext cx="4297680" cy="27432"/>
-          </a:xfrm>
-          <a:prstGeom prst="rect">
-            <a:avLst/>
-          </a:prstGeom>
-          <a:solidFill>
-            <a:schemeClr val="accent4"/>
-          </a:solidFill>
-          <a:ln>
-            <a:noFill/>
-          </a:ln>
-        </p:spPr>
-        <p:style>
-          <a:lnRef idx="2">
-            <a:schemeClr val="accent1">
-              <a:shade val="50000"/>
-            </a:schemeClr>
-          </a:lnRef>
-          <a:fillRef idx="1">
-            <a:schemeClr val="accent1"/>
-          </a:fillRef>
-          <a:effectRef idx="0">
-            <a:schemeClr val="accent1"/>
-          </a:effectRef>
-          <a:fontRef idx="minor">
-            <a:schemeClr val="lt1"/>
-          </a:fontRef>
-        </p:style>
-        <p:txBody>
-          <a:bodyPr rtlCol="0" anchor="ctr"/>
-          <a:lstStyle/>
-          <a:p>
-            <a:pPr algn="ctr"/>
-            <a:endParaRPr lang="en-US"/>
-          </a:p>
-        </p:txBody>
-      </p:sp>
-      <p:sp>
-        <p:nvSpPr>
-          <p:cNvPr id="8" name="Content Placeholder 7">
-            <a:extLst>
-              <a:ext uri="{FF2B5EF4-FFF2-40B4-BE49-F238E27FC236}">
-                <a16:creationId xmlns:a16="http://schemas.microsoft.com/office/drawing/2014/main" id="{9866B5DB-FBA5-A3F7-97CE-27C6E04CE77C}"/>
+        <p:spPr/>
+        <p:txBody>
+          <a:bodyPr/>
+          <a:lstStyle/>
+          <a:p>
+            <a:endParaRPr lang="ko-KR" altLang="en-US"/>
+          </a:p>
+        </p:txBody>
+      </p:sp>
+      <p:sp>
+        <p:nvSpPr>
+          <p:cNvPr id="3" name="내용 개체 틀 2">
+            <a:extLst>
+              <a:ext uri="{FF2B5EF4-FFF2-40B4-BE49-F238E27FC236}">
+                <a16:creationId xmlns:a16="http://schemas.microsoft.com/office/drawing/2014/main" id="{14AA8FA8-D61E-1CEB-FD29-A67F37AA0A75}"/>
               </a:ext>
             </a:extLst>
           </p:cNvPr>
@@ -6558,646 +7626,47 @@
             <p:ph idx="1"/>
           </p:nvPr>
         </p:nvSpPr>
-        <p:spPr>
-          <a:xfrm>
-            <a:off x="590719" y="2330505"/>
-            <a:ext cx="4559425" cy="3979585"/>
-          </a:xfrm>
-        </p:spPr>
-        <p:txBody>
-          <a:bodyPr anchor="ctr">
-            <a:normAutofit/>
-          </a:bodyPr>
-          <a:lstStyle/>
-          <a:p>
-            <a:endParaRPr lang="en-US" sz="2000" dirty="0"/>
-          </a:p>
-        </p:txBody>
-      </p:sp>
-      <p:sp>
-        <p:nvSpPr>
-          <p:cNvPr id="19" name="Rectangle 18">
-            <a:extLst>
-              <a:ext uri="{FF2B5EF4-FFF2-40B4-BE49-F238E27FC236}">
-                <a16:creationId xmlns:a16="http://schemas.microsoft.com/office/drawing/2014/main" id="{C13237C8-E62C-4F0D-A318-BD6FB6C2D138}"/>
-              </a:ext>
-              <a:ext uri="{C183D7F6-B498-43B3-948B-1728B52AA6E4}">
-                <adec:decorative xmlns:adec="http://schemas.microsoft.com/office/drawing/2017/decorative" val="1"/>
-              </a:ext>
-            </a:extLst>
-          </p:cNvPr>
-          <p:cNvSpPr>
-            <a:spLocks noGrp="1" noRot="1" noChangeAspect="1" noMove="1" noResize="1" noEditPoints="1" noAdjustHandles="1" noChangeArrowheads="1" noChangeShapeType="1" noTextEdit="1"/>
-          </p:cNvSpPr>
-          <p:nvPr>
-            <p:extLst>
-              <p:ext uri="{386F3935-93C4-4BCD-93E2-E3B085C9AB24}">
-                <p16:designElem xmlns:p16="http://schemas.microsoft.com/office/powerpoint/2015/main" val="1"/>
-              </p:ext>
-            </p:extLst>
-          </p:nvPr>
-        </p:nvSpPr>
-        <p:spPr>
-          <a:xfrm flipH="1">
-            <a:off x="10697670" y="0"/>
-            <a:ext cx="1494330" cy="6858000"/>
-          </a:xfrm>
-          <a:prstGeom prst="rect">
-            <a:avLst/>
-          </a:prstGeom>
-          <a:solidFill>
-            <a:schemeClr val="accent4"/>
-          </a:solidFill>
-          <a:ln>
-            <a:noFill/>
-          </a:ln>
-        </p:spPr>
-        <p:style>
-          <a:lnRef idx="2">
-            <a:schemeClr val="accent1">
-              <a:shade val="50000"/>
-            </a:schemeClr>
-          </a:lnRef>
-          <a:fillRef idx="1">
-            <a:schemeClr val="accent1"/>
-          </a:fillRef>
-          <a:effectRef idx="0">
-            <a:schemeClr val="accent1"/>
-          </a:effectRef>
-          <a:fontRef idx="minor">
-            <a:schemeClr val="lt1"/>
-          </a:fontRef>
-        </p:style>
-        <p:txBody>
-          <a:bodyPr rtlCol="0" anchor="ctr"/>
-          <a:lstStyle/>
-          <a:p>
-            <a:pPr algn="ctr"/>
-            <a:endParaRPr lang="en-US"/>
-          </a:p>
-        </p:txBody>
-      </p:sp>
-      <p:sp>
-        <p:nvSpPr>
-          <p:cNvPr id="21" name="Rectangle 20">
-            <a:extLst>
-              <a:ext uri="{FF2B5EF4-FFF2-40B4-BE49-F238E27FC236}">
-                <a16:creationId xmlns:a16="http://schemas.microsoft.com/office/drawing/2014/main" id="{19C9EAEA-39D0-4B0E-A0EB-51E7B26740B1}"/>
-              </a:ext>
-              <a:ext uri="{C183D7F6-B498-43B3-948B-1728B52AA6E4}">
-                <adec:decorative xmlns:adec="http://schemas.microsoft.com/office/drawing/2017/decorative" val="1"/>
-              </a:ext>
-            </a:extLst>
-          </p:cNvPr>
-          <p:cNvSpPr>
-            <a:spLocks noGrp="1" noRot="1" noChangeAspect="1" noMove="1" noResize="1" noEditPoints="1" noAdjustHandles="1" noChangeArrowheads="1" noChangeShapeType="1" noTextEdit="1"/>
-          </p:cNvSpPr>
-          <p:nvPr>
-            <p:extLst>
-              <p:ext uri="{386F3935-93C4-4BCD-93E2-E3B085C9AB24}">
-                <p16:designElem xmlns:p16="http://schemas.microsoft.com/office/powerpoint/2015/main" val="1"/>
-              </p:ext>
-            </p:extLst>
-          </p:nvPr>
-        </p:nvSpPr>
-        <p:spPr>
-          <a:xfrm>
-            <a:off x="5685810" y="513853"/>
-            <a:ext cx="6009366" cy="5834577"/>
-          </a:xfrm>
-          <a:prstGeom prst="rect">
-            <a:avLst/>
-          </a:prstGeom>
-          <a:solidFill>
-            <a:schemeClr val="bg1"/>
-          </a:solidFill>
-          <a:ln>
-            <a:noFill/>
-          </a:ln>
-          <a:effectLst>
-            <a:outerShdw blurRad="139700" dist="127000" dir="5400000" algn="t" rotWithShape="0">
-              <a:prstClr val="black">
-                <a:alpha val="15000"/>
-              </a:prstClr>
-            </a:outerShdw>
-          </a:effectLst>
-        </p:spPr>
-        <p:style>
-          <a:lnRef idx="2">
-            <a:schemeClr val="accent1">
-              <a:shade val="50000"/>
-            </a:schemeClr>
-          </a:lnRef>
-          <a:fillRef idx="1">
-            <a:schemeClr val="accent1"/>
-          </a:fillRef>
-          <a:effectRef idx="0">
-            <a:schemeClr val="accent1"/>
-          </a:effectRef>
-          <a:fontRef idx="minor">
-            <a:schemeClr val="lt1"/>
-          </a:fontRef>
-        </p:style>
-        <p:txBody>
-          <a:bodyPr rtlCol="0" anchor="ctr"/>
-          <a:lstStyle/>
-          <a:p>
-            <a:pPr algn="ctr"/>
-            <a:endParaRPr lang="en-US"/>
-          </a:p>
-        </p:txBody>
-      </p:sp>
-      <p:pic>
-        <p:nvPicPr>
-          <p:cNvPr id="4" name="내용 개체 틀 3">
-            <a:extLst>
-              <a:ext uri="{FF2B5EF4-FFF2-40B4-BE49-F238E27FC236}">
-                <a16:creationId xmlns:a16="http://schemas.microsoft.com/office/drawing/2014/main" id="{026F7DF3-E713-14F0-F0FD-838D41E7AF7F}"/>
-              </a:ext>
-            </a:extLst>
-          </p:cNvPr>
-          <p:cNvPicPr>
-            <a:picLocks noChangeAspect="1"/>
-          </p:cNvPicPr>
-          <p:nvPr/>
-        </p:nvPicPr>
-        <p:blipFill rotWithShape="1">
-          <a:blip r:embed="rId2"/>
-          <a:srcRect t="4274" r="-2" b="-2"/>
-          <a:stretch/>
-        </p:blipFill>
-        <p:spPr>
-          <a:xfrm>
-            <a:off x="5627851" y="224071"/>
-            <a:ext cx="6404808" cy="6297045"/>
-          </a:xfrm>
-          <a:prstGeom prst="rect">
-            <a:avLst/>
-          </a:prstGeom>
-        </p:spPr>
-      </p:pic>
+        <p:spPr/>
+        <p:txBody>
+          <a:bodyPr/>
+          <a:lstStyle/>
+          <a:p>
+            <a:r>
+              <a:rPr lang="en-US" altLang="ko-KR" dirty="0"/>
+              <a:t>Parent</a:t>
+            </a:r>
+            <a:r>
+              <a:rPr lang="ko-KR" altLang="en-US" dirty="0"/>
+              <a:t> </a:t>
+            </a:r>
+            <a:r>
+              <a:rPr lang="en-US" altLang="ko-KR" dirty="0"/>
+              <a:t>-&gt;</a:t>
+            </a:r>
+            <a:r>
+              <a:rPr lang="ko-KR" altLang="en-US" dirty="0"/>
+              <a:t> </a:t>
+            </a:r>
+            <a:r>
+              <a:rPr lang="en-US" altLang="ko-KR" dirty="0"/>
+              <a:t>left=left</a:t>
+            </a:r>
+          </a:p>
+          <a:p>
+            <a:r>
+              <a:rPr lang="en-US" altLang="ko-KR" dirty="0"/>
+              <a:t>Parent -&gt; right=right</a:t>
+            </a:r>
+          </a:p>
+          <a:p>
+            <a:endParaRPr lang="ko-KR" altLang="en-US" dirty="0"/>
+          </a:p>
+        </p:txBody>
+      </p:sp>
     </p:spTree>
     <p:extLst>
       <p:ext uri="{BB962C8B-B14F-4D97-AF65-F5344CB8AC3E}">
-        <p14:creationId xmlns:p14="http://schemas.microsoft.com/office/powerpoint/2010/main" val="1258406727"/>
-      </p:ext>
-    </p:extLst>
-  </p:cSld>
-  <p:clrMapOvr>
-    <a:masterClrMapping/>
-  </p:clrMapOvr>
-</p:sld>
-</file>
-
-<file path=ppt/slides/slide9.xml><?xml version="1.0" encoding="utf-8"?>
-<p:sld xmlns:a="http://schemas.openxmlformats.org/drawingml/2006/main" xmlns:r="http://schemas.openxmlformats.org/officeDocument/2006/relationships" xmlns:p="http://schemas.openxmlformats.org/presentationml/2006/main">
-  <p:cSld>
-    <p:bg>
-      <p:bgPr>
-        <a:solidFill>
-          <a:schemeClr val="bg1"/>
-        </a:solidFill>
-        <a:effectLst/>
-      </p:bgPr>
-    </p:bg>
-    <p:spTree>
-      <p:nvGrpSpPr>
-        <p:cNvPr id="1" name=""/>
-        <p:cNvGrpSpPr/>
-        <p:nvPr/>
-      </p:nvGrpSpPr>
-      <p:grpSpPr>
-        <a:xfrm>
-          <a:off x="0" y="0"/>
-          <a:ext cx="0" cy="0"/>
-          <a:chOff x="0" y="0"/>
-          <a:chExt cx="0" cy="0"/>
-        </a:xfrm>
-      </p:grpSpPr>
-      <p:sp useBgFill="1">
-        <p:nvSpPr>
-          <p:cNvPr id="12" name="Rectangle 11">
-            <a:extLst>
-              <a:ext uri="{FF2B5EF4-FFF2-40B4-BE49-F238E27FC236}">
-                <a16:creationId xmlns:a16="http://schemas.microsoft.com/office/drawing/2014/main" id="{2F687420-BEB4-45CD-8226-339BE553B8E6}"/>
-              </a:ext>
-              <a:ext uri="{C183D7F6-B498-43B3-948B-1728B52AA6E4}">
-                <adec:decorative xmlns:adec="http://schemas.microsoft.com/office/drawing/2017/decorative" val="1"/>
-              </a:ext>
-            </a:extLst>
-          </p:cNvPr>
-          <p:cNvSpPr>
-            <a:spLocks noGrp="1" noRot="1" noChangeAspect="1" noMove="1" noResize="1" noEditPoints="1" noAdjustHandles="1" noChangeArrowheads="1" noChangeShapeType="1" noTextEdit="1"/>
-          </p:cNvSpPr>
-          <p:nvPr>
-            <p:extLst>
-              <p:ext uri="{386F3935-93C4-4BCD-93E2-E3B085C9AB24}">
-                <p16:designElem xmlns:p16="http://schemas.microsoft.com/office/powerpoint/2015/main" val="1"/>
-              </p:ext>
-            </p:extLst>
-          </p:nvPr>
-        </p:nvSpPr>
-        <p:spPr>
-          <a:xfrm>
-            <a:off x="0" y="0"/>
-            <a:ext cx="12191999" cy="6857365"/>
-          </a:xfrm>
-          <a:prstGeom prst="rect">
-            <a:avLst/>
-          </a:prstGeom>
-          <a:ln>
-            <a:noFill/>
-          </a:ln>
-        </p:spPr>
-        <p:style>
-          <a:lnRef idx="2">
-            <a:schemeClr val="accent1">
-              <a:shade val="50000"/>
-            </a:schemeClr>
-          </a:lnRef>
-          <a:fillRef idx="1">
-            <a:schemeClr val="accent1"/>
-          </a:fillRef>
-          <a:effectRef idx="0">
-            <a:schemeClr val="accent1"/>
-          </a:effectRef>
-          <a:fontRef idx="minor">
-            <a:schemeClr val="lt1"/>
-          </a:fontRef>
-        </p:style>
-        <p:txBody>
-          <a:bodyPr rtlCol="0" anchor="ctr"/>
-          <a:lstStyle/>
-          <a:p>
-            <a:pPr algn="ctr"/>
-            <a:endParaRPr lang="en-US"/>
-          </a:p>
-        </p:txBody>
-      </p:sp>
-      <p:sp>
-        <p:nvSpPr>
-          <p:cNvPr id="2" name="제목 1">
-            <a:extLst>
-              <a:ext uri="{FF2B5EF4-FFF2-40B4-BE49-F238E27FC236}">
-                <a16:creationId xmlns:a16="http://schemas.microsoft.com/office/drawing/2014/main" id="{51101ECD-AC86-E37C-EA38-88B08BCF9273}"/>
-              </a:ext>
-            </a:extLst>
-          </p:cNvPr>
-          <p:cNvSpPr>
-            <a:spLocks noGrp="1"/>
-          </p:cNvSpPr>
-          <p:nvPr>
-            <p:ph type="title"/>
-          </p:nvPr>
-        </p:nvSpPr>
-        <p:spPr>
-          <a:xfrm>
-            <a:off x="645067" y="490123"/>
-            <a:ext cx="4282983" cy="1200361"/>
-          </a:xfrm>
-        </p:spPr>
-        <p:txBody>
-          <a:bodyPr anchor="b">
-            <a:normAutofit/>
-          </a:bodyPr>
-          <a:lstStyle/>
-          <a:p>
-            <a:r>
-              <a:rPr lang="en-US" altLang="ko-KR" sz="3600" dirty="0"/>
-              <a:t>Main </a:t>
-            </a:r>
-            <a:r>
-              <a:rPr lang="ko-KR" altLang="en-US" sz="3600" dirty="0"/>
-              <a:t>함수</a:t>
-            </a:r>
-          </a:p>
-        </p:txBody>
-      </p:sp>
-      <p:sp>
-        <p:nvSpPr>
-          <p:cNvPr id="14" name="Rectangle 13">
-            <a:extLst>
-              <a:ext uri="{FF2B5EF4-FFF2-40B4-BE49-F238E27FC236}">
-                <a16:creationId xmlns:a16="http://schemas.microsoft.com/office/drawing/2014/main" id="{169CC832-2974-4E8D-90ED-3E2941BA7336}"/>
-              </a:ext>
-              <a:ext uri="{C183D7F6-B498-43B3-948B-1728B52AA6E4}">
-                <adec:decorative xmlns:adec="http://schemas.microsoft.com/office/drawing/2017/decorative" val="1"/>
-              </a:ext>
-            </a:extLst>
-          </p:cNvPr>
-          <p:cNvSpPr>
-            <a:spLocks noGrp="1" noRot="1" noChangeAspect="1" noMove="1" noResize="1" noEditPoints="1" noAdjustHandles="1" noChangeArrowheads="1" noChangeShapeType="1" noTextEdit="1"/>
-          </p:cNvSpPr>
-          <p:nvPr>
-            <p:extLst>
-              <p:ext uri="{386F3935-93C4-4BCD-93E2-E3B085C9AB24}">
-                <p16:designElem xmlns:p16="http://schemas.microsoft.com/office/powerpoint/2015/main" val="1"/>
-              </p:ext>
-            </p:extLst>
-          </p:nvPr>
-        </p:nvSpPr>
-        <p:spPr>
-          <a:xfrm flipH="1">
-            <a:off x="616533" y="1944913"/>
-            <a:ext cx="4023360" cy="27432"/>
-          </a:xfrm>
-          <a:prstGeom prst="rect">
-            <a:avLst/>
-          </a:prstGeom>
-          <a:solidFill>
-            <a:schemeClr val="accent4"/>
-          </a:solidFill>
-          <a:ln>
-            <a:noFill/>
-          </a:ln>
-        </p:spPr>
-        <p:style>
-          <a:lnRef idx="2">
-            <a:schemeClr val="accent1">
-              <a:shade val="50000"/>
-            </a:schemeClr>
-          </a:lnRef>
-          <a:fillRef idx="1">
-            <a:schemeClr val="accent1"/>
-          </a:fillRef>
-          <a:effectRef idx="0">
-            <a:schemeClr val="accent1"/>
-          </a:effectRef>
-          <a:fontRef idx="minor">
-            <a:schemeClr val="lt1"/>
-          </a:fontRef>
-        </p:style>
-        <p:txBody>
-          <a:bodyPr rtlCol="0" anchor="ctr"/>
-          <a:lstStyle/>
-          <a:p>
-            <a:pPr algn="ctr"/>
-            <a:endParaRPr lang="en-US"/>
-          </a:p>
-        </p:txBody>
-      </p:sp>
-      <p:sp>
-        <p:nvSpPr>
-          <p:cNvPr id="9" name="Content Placeholder 8">
-            <a:extLst>
-              <a:ext uri="{FF2B5EF4-FFF2-40B4-BE49-F238E27FC236}">
-                <a16:creationId xmlns:a16="http://schemas.microsoft.com/office/drawing/2014/main" id="{FDF2BBBE-2C89-1EBF-6DB5-54BC8BCE9BA2}"/>
-              </a:ext>
-            </a:extLst>
-          </p:cNvPr>
-          <p:cNvSpPr>
-            <a:spLocks noGrp="1"/>
-          </p:cNvSpPr>
-          <p:nvPr>
-            <p:ph idx="1"/>
-          </p:nvPr>
-        </p:nvSpPr>
-        <p:spPr>
-          <a:xfrm>
-            <a:off x="645066" y="2031101"/>
-            <a:ext cx="4282984" cy="3511943"/>
-          </a:xfrm>
-        </p:spPr>
-        <p:txBody>
-          <a:bodyPr anchor="ctr">
-            <a:normAutofit/>
-          </a:bodyPr>
-          <a:lstStyle/>
-          <a:p>
-            <a:endParaRPr lang="en-US" sz="1800"/>
-          </a:p>
-        </p:txBody>
-      </p:sp>
-      <p:sp>
-        <p:nvSpPr>
-          <p:cNvPr id="16" name="Rectangle 15">
-            <a:extLst>
-              <a:ext uri="{FF2B5EF4-FFF2-40B4-BE49-F238E27FC236}">
-                <a16:creationId xmlns:a16="http://schemas.microsoft.com/office/drawing/2014/main" id="{55222F96-971A-4F90-B841-6BAB416C7AC1}"/>
-              </a:ext>
-              <a:ext uri="{C183D7F6-B498-43B3-948B-1728B52AA6E4}">
-                <adec:decorative xmlns:adec="http://schemas.microsoft.com/office/drawing/2017/decorative" val="1"/>
-              </a:ext>
-            </a:extLst>
-          </p:cNvPr>
-          <p:cNvSpPr>
-            <a:spLocks noGrp="1" noRot="1" noChangeAspect="1" noMove="1" noResize="1" noEditPoints="1" noAdjustHandles="1" noChangeArrowheads="1" noChangeShapeType="1" noTextEdit="1"/>
-          </p:cNvSpPr>
-          <p:nvPr>
-            <p:extLst>
-              <p:ext uri="{386F3935-93C4-4BCD-93E2-E3B085C9AB24}">
-                <p16:designElem xmlns:p16="http://schemas.microsoft.com/office/powerpoint/2015/main" val="1"/>
-              </p:ext>
-            </p:extLst>
-          </p:nvPr>
-        </p:nvSpPr>
-        <p:spPr>
-          <a:xfrm rot="5400000">
-            <a:off x="-225843" y="6053360"/>
-            <a:ext cx="740664" cy="154124"/>
-          </a:xfrm>
-          <a:prstGeom prst="rect">
-            <a:avLst/>
-          </a:prstGeom>
-          <a:solidFill>
-            <a:schemeClr val="accent4"/>
-          </a:solidFill>
-          <a:ln>
-            <a:noFill/>
-          </a:ln>
-        </p:spPr>
-        <p:style>
-          <a:lnRef idx="2">
-            <a:schemeClr val="accent1">
-              <a:shade val="50000"/>
-            </a:schemeClr>
-          </a:lnRef>
-          <a:fillRef idx="1">
-            <a:schemeClr val="accent1"/>
-          </a:fillRef>
-          <a:effectRef idx="0">
-            <a:schemeClr val="accent1"/>
-          </a:effectRef>
-          <a:fontRef idx="minor">
-            <a:schemeClr val="lt1"/>
-          </a:fontRef>
-        </p:style>
-        <p:txBody>
-          <a:bodyPr rtlCol="0" anchor="ctr"/>
-          <a:lstStyle/>
-          <a:p>
-            <a:pPr algn="ctr"/>
-            <a:endParaRPr lang="en-US"/>
-          </a:p>
-        </p:txBody>
-      </p:sp>
-      <p:sp>
-        <p:nvSpPr>
-          <p:cNvPr id="18" name="Rectangle 17">
-            <a:extLst>
-              <a:ext uri="{FF2B5EF4-FFF2-40B4-BE49-F238E27FC236}">
-                <a16:creationId xmlns:a16="http://schemas.microsoft.com/office/drawing/2014/main" id="{08980754-6F4B-43C9-B9BE-127B6BED6586}"/>
-              </a:ext>
-              <a:ext uri="{C183D7F6-B498-43B3-948B-1728B52AA6E4}">
-                <adec:decorative xmlns:adec="http://schemas.microsoft.com/office/drawing/2017/decorative" val="1"/>
-              </a:ext>
-            </a:extLst>
-          </p:cNvPr>
-          <p:cNvSpPr>
-            <a:spLocks noGrp="1" noRot="1" noChangeAspect="1" noMove="1" noResize="1" noEditPoints="1" noAdjustHandles="1" noChangeArrowheads="1" noChangeShapeType="1" noTextEdit="1"/>
-          </p:cNvSpPr>
-          <p:nvPr>
-            <p:extLst>
-              <p:ext uri="{386F3935-93C4-4BCD-93E2-E3B085C9AB24}">
-                <p16:designElem xmlns:p16="http://schemas.microsoft.com/office/powerpoint/2015/main" val="1"/>
-              </p:ext>
-            </p:extLst>
-          </p:nvPr>
-        </p:nvSpPr>
-        <p:spPr>
-          <a:xfrm rot="5400000">
-            <a:off x="5904923" y="215201"/>
-            <a:ext cx="740664" cy="11833491"/>
-          </a:xfrm>
-          <a:prstGeom prst="rect">
-            <a:avLst/>
-          </a:prstGeom>
-          <a:solidFill>
-            <a:schemeClr val="accent4"/>
-          </a:solidFill>
-          <a:ln>
-            <a:noFill/>
-          </a:ln>
-        </p:spPr>
-        <p:style>
-          <a:lnRef idx="2">
-            <a:schemeClr val="accent1">
-              <a:shade val="50000"/>
-            </a:schemeClr>
-          </a:lnRef>
-          <a:fillRef idx="1">
-            <a:schemeClr val="accent1"/>
-          </a:fillRef>
-          <a:effectRef idx="0">
-            <a:schemeClr val="accent1"/>
-          </a:effectRef>
-          <a:fontRef idx="minor">
-            <a:schemeClr val="lt1"/>
-          </a:fontRef>
-        </p:style>
-        <p:txBody>
-          <a:bodyPr rtlCol="0" anchor="ctr"/>
-          <a:lstStyle/>
-          <a:p>
-            <a:pPr algn="ctr"/>
-            <a:endParaRPr lang="en-US"/>
-          </a:p>
-        </p:txBody>
-      </p:sp>
-      <p:sp>
-        <p:nvSpPr>
-          <p:cNvPr id="20" name="Rectangle 19">
-            <a:extLst>
-              <a:ext uri="{FF2B5EF4-FFF2-40B4-BE49-F238E27FC236}">
-                <a16:creationId xmlns:a16="http://schemas.microsoft.com/office/drawing/2014/main" id="{2C1BBA94-3F40-40AA-8BB9-E69E25E537C1}"/>
-              </a:ext>
-              <a:ext uri="{C183D7F6-B498-43B3-948B-1728B52AA6E4}">
-                <adec:decorative xmlns:adec="http://schemas.microsoft.com/office/drawing/2017/decorative" val="1"/>
-              </a:ext>
-            </a:extLst>
-          </p:cNvPr>
-          <p:cNvSpPr>
-            <a:spLocks noGrp="1" noRot="1" noChangeAspect="1" noMove="1" noResize="1" noEditPoints="1" noAdjustHandles="1" noChangeArrowheads="1" noChangeShapeType="1" noTextEdit="1"/>
-          </p:cNvSpPr>
-          <p:nvPr>
-            <p:extLst>
-              <p:ext uri="{386F3935-93C4-4BCD-93E2-E3B085C9AB24}">
-                <p16:designElem xmlns:p16="http://schemas.microsoft.com/office/powerpoint/2015/main" val="1"/>
-              </p:ext>
-            </p:extLst>
-          </p:nvPr>
-        </p:nvSpPr>
-        <p:spPr>
-          <a:xfrm>
-            <a:off x="5696793" y="354959"/>
-            <a:ext cx="6184973" cy="5915212"/>
-          </a:xfrm>
-          <a:prstGeom prst="rect">
-            <a:avLst/>
-          </a:prstGeom>
-          <a:solidFill>
-            <a:schemeClr val="bg1"/>
-          </a:solidFill>
-          <a:ln>
-            <a:noFill/>
-          </a:ln>
-          <a:effectLst>
-            <a:outerShdw blurRad="139700" dist="127000" dir="5400000" algn="t" rotWithShape="0">
-              <a:prstClr val="black">
-                <a:alpha val="15000"/>
-              </a:prstClr>
-            </a:outerShdw>
-          </a:effectLst>
-        </p:spPr>
-        <p:style>
-          <a:lnRef idx="2">
-            <a:schemeClr val="accent1">
-              <a:shade val="50000"/>
-            </a:schemeClr>
-          </a:lnRef>
-          <a:fillRef idx="1">
-            <a:schemeClr val="accent1"/>
-          </a:fillRef>
-          <a:effectRef idx="0">
-            <a:schemeClr val="accent1"/>
-          </a:effectRef>
-          <a:fontRef idx="minor">
-            <a:schemeClr val="lt1"/>
-          </a:fontRef>
-        </p:style>
-        <p:txBody>
-          <a:bodyPr rtlCol="0" anchor="ctr"/>
-          <a:lstStyle/>
-          <a:p>
-            <a:pPr algn="ctr"/>
-            <a:endParaRPr lang="en-US"/>
-          </a:p>
-        </p:txBody>
-      </p:sp>
-      <p:pic>
-        <p:nvPicPr>
-          <p:cNvPr id="10" name="그림 9">
-            <a:extLst>
-              <a:ext uri="{FF2B5EF4-FFF2-40B4-BE49-F238E27FC236}">
-                <a16:creationId xmlns:a16="http://schemas.microsoft.com/office/drawing/2014/main" id="{68195824-E267-9D61-7248-EF86161A5E89}"/>
-              </a:ext>
-            </a:extLst>
-          </p:cNvPr>
-          <p:cNvPicPr>
-            <a:picLocks noChangeAspect="1"/>
-          </p:cNvPicPr>
-          <p:nvPr/>
-        </p:nvPicPr>
-        <p:blipFill>
-          <a:blip r:embed="rId2"/>
-          <a:stretch>
-            <a:fillRect/>
-          </a:stretch>
-        </p:blipFill>
-        <p:spPr>
-          <a:xfrm>
-            <a:off x="5450275" y="27431"/>
-            <a:ext cx="5378146" cy="6755504"/>
-          </a:xfrm>
-          <a:prstGeom prst="rect">
-            <a:avLst/>
-          </a:prstGeom>
-        </p:spPr>
-      </p:pic>
-    </p:spTree>
-    <p:extLst>
-      <p:ext uri="{BB962C8B-B14F-4D97-AF65-F5344CB8AC3E}">
-        <p14:creationId xmlns:p14="http://schemas.microsoft.com/office/powerpoint/2010/main" val="3242079656"/>
+        <p14:creationId xmlns:p14="http://schemas.microsoft.com/office/powerpoint/2010/main" val="4258888185"/>
       </p:ext>
     </p:extLst>
   </p:cSld>
